--- a/SAYbrand_deck.pptx
+++ b/SAYbrand_deck.pptx
@@ -5,31 +5,31 @@
     <p:sldMasterId id="2147483648" r:id="rId1"/>
   </p:sldMasterIdLst>
   <p:sldIdLst>
-    <p:sldId id="256" r:id="rId7"/>
-    <p:sldId id="257" r:id="rId8"/>
-    <p:sldId id="258" r:id="rId9"/>
-    <p:sldId id="259" r:id="rId10"/>
-    <p:sldId id="260" r:id="rId11"/>
-    <p:sldId id="261" r:id="rId12"/>
-    <p:sldId id="262" r:id="rId13"/>
-    <p:sldId id="263" r:id="rId14"/>
-    <p:sldId id="264" r:id="rId15"/>
-    <p:sldId id="265" r:id="rId16"/>
-    <p:sldId id="266" r:id="rId17"/>
-    <p:sldId id="267" r:id="rId18"/>
-    <p:sldId id="268" r:id="rId19"/>
-    <p:sldId id="269" r:id="rId20"/>
-    <p:sldId id="270" r:id="rId21"/>
-    <p:sldId id="271" r:id="rId22"/>
-    <p:sldId id="272" r:id="rId23"/>
-    <p:sldId id="273" r:id="rId24"/>
-    <p:sldId id="274" r:id="rId25"/>
-    <p:sldId id="275" r:id="rId26"/>
-    <p:sldId id="276" r:id="rId27"/>
-    <p:sldId id="277" r:id="rId28"/>
-    <p:sldId id="278" r:id="rId29"/>
+    <p:sldId id="256" r:id="rId2"/>
+    <p:sldId id="257" r:id="rId3"/>
+    <p:sldId id="258" r:id="rId4"/>
+    <p:sldId id="259" r:id="rId5"/>
+    <p:sldId id="260" r:id="rId6"/>
+    <p:sldId id="261" r:id="rId7"/>
+    <p:sldId id="262" r:id="rId8"/>
+    <p:sldId id="263" r:id="rId9"/>
+    <p:sldId id="264" r:id="rId10"/>
+    <p:sldId id="265" r:id="rId11"/>
+    <p:sldId id="266" r:id="rId12"/>
+    <p:sldId id="267" r:id="rId13"/>
+    <p:sldId id="268" r:id="rId14"/>
+    <p:sldId id="269" r:id="rId15"/>
+    <p:sldId id="270" r:id="rId16"/>
+    <p:sldId id="271" r:id="rId17"/>
+    <p:sldId id="272" r:id="rId18"/>
+    <p:sldId id="273" r:id="rId19"/>
+    <p:sldId id="274" r:id="rId20"/>
+    <p:sldId id="275" r:id="rId21"/>
+    <p:sldId id="276" r:id="rId22"/>
+    <p:sldId id="277" r:id="rId23"/>
+    <p:sldId id="278" r:id="rId24"/>
   </p:sldIdLst>
-  <p:sldSz cx="12188952" cy="6858000" type="screen4x3"/>
+  <p:sldSz cx="12188825" cy="6858000"/>
   <p:notesSz cx="6858000" cy="9144000"/>
   <p:defaultTextStyle>
     <a:defPPr>
@@ -126,6 +126,22 @@
       </a:defRPr>
     </a:lvl9pPr>
   </p:defaultTextStyle>
+  <p:extLst>
+    <p:ext uri="{EFAFB233-063F-42B5-8137-9DF3F51BA10A}">
+      <p15:sldGuideLst xmlns:p15="http://schemas.microsoft.com/office/powerpoint/2012/main">
+        <p15:guide id="1" orient="horz" pos="2160">
+          <p15:clr>
+            <a:srgbClr val="A4A3A4"/>
+          </p15:clr>
+        </p15:guide>
+        <p15:guide id="2" pos="2880">
+          <p15:clr>
+            <a:srgbClr val="A4A3A4"/>
+          </p15:clr>
+        </p15:guide>
+      </p15:sldGuideLst>
+    </p:ext>
+  </p:extLst>
 </p:presentation>
 </file>
 
@@ -167,10 +183,9 @@
           <a:lstStyle/>
           <a:p>
             <a:r>
-              <a:rPr lang="en-US" smtClean="0"/>
+              <a:rPr lang="en-US"/>
               <a:t>Click to edit Master title style</a:t>
             </a:r>
-            <a:endParaRPr lang="en-US"/>
           </a:p>
         </p:txBody>
       </p:sp>
@@ -286,10 +301,9 @@
           </a:lstStyle>
           <a:p>
             <a:r>
-              <a:rPr lang="en-US" smtClean="0"/>
+              <a:rPr lang="en-US"/>
               <a:t>Click to edit Master subtitle style</a:t>
             </a:r>
-            <a:endParaRPr lang="en-US"/>
           </a:p>
         </p:txBody>
       </p:sp>
@@ -310,7 +324,7 @@
           <a:p>
             <a:fld id="{5BCAD085-E8A6-8845-BD4E-CB4CCA059FC4}" type="datetimeFigureOut">
               <a:rPr lang="en-US" smtClean="0"/>
-              <a:t>1/27/13</a:t>
+              <a:t>6/21/2026</a:t>
             </a:fld>
             <a:endParaRPr lang="en-US"/>
           </a:p>
@@ -404,10 +418,9 @@
           <a:lstStyle/>
           <a:p>
             <a:r>
-              <a:rPr lang="en-US" smtClean="0"/>
+              <a:rPr lang="en-US"/>
               <a:t>Click to edit Master title style</a:t>
             </a:r>
-            <a:endParaRPr lang="en-US"/>
           </a:p>
         </p:txBody>
       </p:sp>
@@ -428,38 +441,37 @@
           <a:p>
             <a:pPr lvl="0"/>
             <a:r>
-              <a:rPr lang="en-US" smtClean="0"/>
+              <a:rPr lang="en-US"/>
               <a:t>Click to edit Master text styles</a:t>
             </a:r>
           </a:p>
           <a:p>
             <a:pPr lvl="1"/>
             <a:r>
-              <a:rPr lang="en-US" smtClean="0"/>
+              <a:rPr lang="en-US"/>
               <a:t>Second level</a:t>
             </a:r>
           </a:p>
           <a:p>
             <a:pPr lvl="2"/>
             <a:r>
-              <a:rPr lang="en-US" smtClean="0"/>
+              <a:rPr lang="en-US"/>
               <a:t>Third level</a:t>
             </a:r>
           </a:p>
           <a:p>
             <a:pPr lvl="3"/>
             <a:r>
-              <a:rPr lang="en-US" smtClean="0"/>
+              <a:rPr lang="en-US"/>
               <a:t>Fourth level</a:t>
             </a:r>
           </a:p>
           <a:p>
             <a:pPr lvl="4"/>
             <a:r>
-              <a:rPr lang="en-US" smtClean="0"/>
+              <a:rPr lang="en-US"/>
               <a:t>Fifth level</a:t>
             </a:r>
-            <a:endParaRPr lang="en-US"/>
           </a:p>
         </p:txBody>
       </p:sp>
@@ -480,7 +492,7 @@
           <a:p>
             <a:fld id="{5BCAD085-E8A6-8845-BD4E-CB4CCA059FC4}" type="datetimeFigureOut">
               <a:rPr lang="en-US" smtClean="0"/>
-              <a:t>1/27/13</a:t>
+              <a:t>6/21/2026</a:t>
             </a:fld>
             <a:endParaRPr lang="en-US"/>
           </a:p>
@@ -579,10 +591,9 @@
           <a:lstStyle/>
           <a:p>
             <a:r>
-              <a:rPr lang="en-US" smtClean="0"/>
+              <a:rPr lang="en-US"/>
               <a:t>Click to edit Master title style</a:t>
             </a:r>
-            <a:endParaRPr lang="en-US"/>
           </a:p>
         </p:txBody>
       </p:sp>
@@ -608,38 +619,37 @@
           <a:p>
             <a:pPr lvl="0"/>
             <a:r>
-              <a:rPr lang="en-US" smtClean="0"/>
+              <a:rPr lang="en-US"/>
               <a:t>Click to edit Master text styles</a:t>
             </a:r>
           </a:p>
           <a:p>
             <a:pPr lvl="1"/>
             <a:r>
-              <a:rPr lang="en-US" smtClean="0"/>
+              <a:rPr lang="en-US"/>
               <a:t>Second level</a:t>
             </a:r>
           </a:p>
           <a:p>
             <a:pPr lvl="2"/>
             <a:r>
-              <a:rPr lang="en-US" smtClean="0"/>
+              <a:rPr lang="en-US"/>
               <a:t>Third level</a:t>
             </a:r>
           </a:p>
           <a:p>
             <a:pPr lvl="3"/>
             <a:r>
-              <a:rPr lang="en-US" smtClean="0"/>
+              <a:rPr lang="en-US"/>
               <a:t>Fourth level</a:t>
             </a:r>
           </a:p>
           <a:p>
             <a:pPr lvl="4"/>
             <a:r>
-              <a:rPr lang="en-US" smtClean="0"/>
+              <a:rPr lang="en-US"/>
               <a:t>Fifth level</a:t>
             </a:r>
-            <a:endParaRPr lang="en-US"/>
           </a:p>
         </p:txBody>
       </p:sp>
@@ -660,7 +670,7 @@
           <a:p>
             <a:fld id="{5BCAD085-E8A6-8845-BD4E-CB4CCA059FC4}" type="datetimeFigureOut">
               <a:rPr lang="en-US" smtClean="0"/>
-              <a:t>1/27/13</a:t>
+              <a:t>6/21/2026</a:t>
             </a:fld>
             <a:endParaRPr lang="en-US"/>
           </a:p>
@@ -754,10 +764,9 @@
           <a:lstStyle/>
           <a:p>
             <a:r>
-              <a:rPr lang="en-US" smtClean="0"/>
+              <a:rPr lang="en-US"/>
               <a:t>Click to edit Master title style</a:t>
             </a:r>
-            <a:endParaRPr lang="en-US"/>
           </a:p>
         </p:txBody>
       </p:sp>
@@ -778,38 +787,37 @@
           <a:p>
             <a:pPr lvl="0"/>
             <a:r>
-              <a:rPr lang="en-US" smtClean="0"/>
+              <a:rPr lang="en-US"/>
               <a:t>Click to edit Master text styles</a:t>
             </a:r>
           </a:p>
           <a:p>
             <a:pPr lvl="1"/>
             <a:r>
-              <a:rPr lang="en-US" smtClean="0"/>
+              <a:rPr lang="en-US"/>
               <a:t>Second level</a:t>
             </a:r>
           </a:p>
           <a:p>
             <a:pPr lvl="2"/>
             <a:r>
-              <a:rPr lang="en-US" smtClean="0"/>
+              <a:rPr lang="en-US"/>
               <a:t>Third level</a:t>
             </a:r>
           </a:p>
           <a:p>
             <a:pPr lvl="3"/>
             <a:r>
-              <a:rPr lang="en-US" smtClean="0"/>
+              <a:rPr lang="en-US"/>
               <a:t>Fourth level</a:t>
             </a:r>
           </a:p>
           <a:p>
             <a:pPr lvl="4"/>
             <a:r>
-              <a:rPr lang="en-US" smtClean="0"/>
+              <a:rPr lang="en-US"/>
               <a:t>Fifth level</a:t>
             </a:r>
-            <a:endParaRPr lang="en-US"/>
           </a:p>
         </p:txBody>
       </p:sp>
@@ -830,7 +838,7 @@
           <a:p>
             <a:fld id="{5BCAD085-E8A6-8845-BD4E-CB4CCA059FC4}" type="datetimeFigureOut">
               <a:rPr lang="en-US" smtClean="0"/>
-              <a:t>1/27/13</a:t>
+              <a:t>6/21/2026</a:t>
             </a:fld>
             <a:endParaRPr lang="en-US"/>
           </a:p>
@@ -933,10 +941,9 @@
           </a:lstStyle>
           <a:p>
             <a:r>
-              <a:rPr lang="en-US" smtClean="0"/>
+              <a:rPr lang="en-US"/>
               <a:t>Click to edit Master title style</a:t>
             </a:r>
-            <a:endParaRPr lang="en-US"/>
           </a:p>
         </p:txBody>
       </p:sp>
@@ -1053,7 +1060,7 @@
           <a:p>
             <a:pPr lvl="0"/>
             <a:r>
-              <a:rPr lang="en-US" smtClean="0"/>
+              <a:rPr lang="en-US"/>
               <a:t>Click to edit Master text styles</a:t>
             </a:r>
           </a:p>
@@ -1076,7 +1083,7 @@
           <a:p>
             <a:fld id="{5BCAD085-E8A6-8845-BD4E-CB4CCA059FC4}" type="datetimeFigureOut">
               <a:rPr lang="en-US" smtClean="0"/>
-              <a:t>1/27/13</a:t>
+              <a:t>6/21/2026</a:t>
             </a:fld>
             <a:endParaRPr lang="en-US"/>
           </a:p>
@@ -1170,10 +1177,9 @@
           <a:lstStyle/>
           <a:p>
             <a:r>
-              <a:rPr lang="en-US" smtClean="0"/>
+              <a:rPr lang="en-US"/>
               <a:t>Click to edit Master title style</a:t>
             </a:r>
-            <a:endParaRPr lang="en-US"/>
           </a:p>
         </p:txBody>
       </p:sp>
@@ -1227,38 +1233,37 @@
           <a:p>
             <a:pPr lvl="0"/>
             <a:r>
-              <a:rPr lang="en-US" smtClean="0"/>
+              <a:rPr lang="en-US"/>
               <a:t>Click to edit Master text styles</a:t>
             </a:r>
           </a:p>
           <a:p>
             <a:pPr lvl="1"/>
             <a:r>
-              <a:rPr lang="en-US" smtClean="0"/>
+              <a:rPr lang="en-US"/>
               <a:t>Second level</a:t>
             </a:r>
           </a:p>
           <a:p>
             <a:pPr lvl="2"/>
             <a:r>
-              <a:rPr lang="en-US" smtClean="0"/>
+              <a:rPr lang="en-US"/>
               <a:t>Third level</a:t>
             </a:r>
           </a:p>
           <a:p>
             <a:pPr lvl="3"/>
             <a:r>
-              <a:rPr lang="en-US" smtClean="0"/>
+              <a:rPr lang="en-US"/>
               <a:t>Fourth level</a:t>
             </a:r>
           </a:p>
           <a:p>
             <a:pPr lvl="4"/>
             <a:r>
-              <a:rPr lang="en-US" smtClean="0"/>
+              <a:rPr lang="en-US"/>
               <a:t>Fifth level</a:t>
             </a:r>
-            <a:endParaRPr lang="en-US"/>
           </a:p>
         </p:txBody>
       </p:sp>
@@ -1312,38 +1317,37 @@
           <a:p>
             <a:pPr lvl="0"/>
             <a:r>
-              <a:rPr lang="en-US" smtClean="0"/>
+              <a:rPr lang="en-US"/>
               <a:t>Click to edit Master text styles</a:t>
             </a:r>
           </a:p>
           <a:p>
             <a:pPr lvl="1"/>
             <a:r>
-              <a:rPr lang="en-US" smtClean="0"/>
+              <a:rPr lang="en-US"/>
               <a:t>Second level</a:t>
             </a:r>
           </a:p>
           <a:p>
             <a:pPr lvl="2"/>
             <a:r>
-              <a:rPr lang="en-US" smtClean="0"/>
+              <a:rPr lang="en-US"/>
               <a:t>Third level</a:t>
             </a:r>
           </a:p>
           <a:p>
             <a:pPr lvl="3"/>
             <a:r>
-              <a:rPr lang="en-US" smtClean="0"/>
+              <a:rPr lang="en-US"/>
               <a:t>Fourth level</a:t>
             </a:r>
           </a:p>
           <a:p>
             <a:pPr lvl="4"/>
             <a:r>
-              <a:rPr lang="en-US" smtClean="0"/>
+              <a:rPr lang="en-US"/>
               <a:t>Fifth level</a:t>
             </a:r>
-            <a:endParaRPr lang="en-US"/>
           </a:p>
         </p:txBody>
       </p:sp>
@@ -1364,7 +1368,7 @@
           <a:p>
             <a:fld id="{5BCAD085-E8A6-8845-BD4E-CB4CCA059FC4}" type="datetimeFigureOut">
               <a:rPr lang="en-US" smtClean="0"/>
-              <a:t>1/27/13</a:t>
+              <a:t>6/21/2026</a:t>
             </a:fld>
             <a:endParaRPr lang="en-US"/>
           </a:p>
@@ -1462,10 +1466,9 @@
           </a:lstStyle>
           <a:p>
             <a:r>
-              <a:rPr lang="en-US" smtClean="0"/>
+              <a:rPr lang="en-US"/>
               <a:t>Click to edit Master title style</a:t>
             </a:r>
-            <a:endParaRPr lang="en-US"/>
           </a:p>
         </p:txBody>
       </p:sp>
@@ -1528,7 +1531,7 @@
           <a:p>
             <a:pPr lvl="0"/>
             <a:r>
-              <a:rPr lang="en-US" smtClean="0"/>
+              <a:rPr lang="en-US"/>
               <a:t>Click to edit Master text styles</a:t>
             </a:r>
           </a:p>
@@ -1584,38 +1587,37 @@
           <a:p>
             <a:pPr lvl="0"/>
             <a:r>
-              <a:rPr lang="en-US" smtClean="0"/>
+              <a:rPr lang="en-US"/>
               <a:t>Click to edit Master text styles</a:t>
             </a:r>
           </a:p>
           <a:p>
             <a:pPr lvl="1"/>
             <a:r>
-              <a:rPr lang="en-US" smtClean="0"/>
+              <a:rPr lang="en-US"/>
               <a:t>Second level</a:t>
             </a:r>
           </a:p>
           <a:p>
             <a:pPr lvl="2"/>
             <a:r>
-              <a:rPr lang="en-US" smtClean="0"/>
+              <a:rPr lang="en-US"/>
               <a:t>Third level</a:t>
             </a:r>
           </a:p>
           <a:p>
             <a:pPr lvl="3"/>
             <a:r>
-              <a:rPr lang="en-US" smtClean="0"/>
+              <a:rPr lang="en-US"/>
               <a:t>Fourth level</a:t>
             </a:r>
           </a:p>
           <a:p>
             <a:pPr lvl="4"/>
             <a:r>
-              <a:rPr lang="en-US" smtClean="0"/>
+              <a:rPr lang="en-US"/>
               <a:t>Fifth level</a:t>
             </a:r>
-            <a:endParaRPr lang="en-US"/>
           </a:p>
         </p:txBody>
       </p:sp>
@@ -1678,7 +1680,7 @@
           <a:p>
             <a:pPr lvl="0"/>
             <a:r>
-              <a:rPr lang="en-US" smtClean="0"/>
+              <a:rPr lang="en-US"/>
               <a:t>Click to edit Master text styles</a:t>
             </a:r>
           </a:p>
@@ -1734,38 +1736,37 @@
           <a:p>
             <a:pPr lvl="0"/>
             <a:r>
-              <a:rPr lang="en-US" smtClean="0"/>
+              <a:rPr lang="en-US"/>
               <a:t>Click to edit Master text styles</a:t>
             </a:r>
           </a:p>
           <a:p>
             <a:pPr lvl="1"/>
             <a:r>
-              <a:rPr lang="en-US" smtClean="0"/>
+              <a:rPr lang="en-US"/>
               <a:t>Second level</a:t>
             </a:r>
           </a:p>
           <a:p>
             <a:pPr lvl="2"/>
             <a:r>
-              <a:rPr lang="en-US" smtClean="0"/>
+              <a:rPr lang="en-US"/>
               <a:t>Third level</a:t>
             </a:r>
           </a:p>
           <a:p>
             <a:pPr lvl="3"/>
             <a:r>
-              <a:rPr lang="en-US" smtClean="0"/>
+              <a:rPr lang="en-US"/>
               <a:t>Fourth level</a:t>
             </a:r>
           </a:p>
           <a:p>
             <a:pPr lvl="4"/>
             <a:r>
-              <a:rPr lang="en-US" smtClean="0"/>
+              <a:rPr lang="en-US"/>
               <a:t>Fifth level</a:t>
             </a:r>
-            <a:endParaRPr lang="en-US"/>
           </a:p>
         </p:txBody>
       </p:sp>
@@ -1786,7 +1787,7 @@
           <a:p>
             <a:fld id="{5BCAD085-E8A6-8845-BD4E-CB4CCA059FC4}" type="datetimeFigureOut">
               <a:rPr lang="en-US" smtClean="0"/>
-              <a:t>1/27/13</a:t>
+              <a:t>6/21/2026</a:t>
             </a:fld>
             <a:endParaRPr lang="en-US"/>
           </a:p>
@@ -1880,10 +1881,9 @@
           <a:lstStyle/>
           <a:p>
             <a:r>
-              <a:rPr lang="en-US" smtClean="0"/>
+              <a:rPr lang="en-US"/>
               <a:t>Click to edit Master title style</a:t>
             </a:r>
-            <a:endParaRPr lang="en-US"/>
           </a:p>
         </p:txBody>
       </p:sp>
@@ -1904,7 +1904,7 @@
           <a:p>
             <a:fld id="{5BCAD085-E8A6-8845-BD4E-CB4CCA059FC4}" type="datetimeFigureOut">
               <a:rPr lang="en-US" smtClean="0"/>
-              <a:t>1/27/13</a:t>
+              <a:t>6/21/2026</a:t>
             </a:fld>
             <a:endParaRPr lang="en-US"/>
           </a:p>
@@ -1999,7 +1999,7 @@
           <a:p>
             <a:fld id="{5BCAD085-E8A6-8845-BD4E-CB4CCA059FC4}" type="datetimeFigureOut">
               <a:rPr lang="en-US" smtClean="0"/>
-              <a:t>1/27/13</a:t>
+              <a:t>6/21/2026</a:t>
             </a:fld>
             <a:endParaRPr lang="en-US"/>
           </a:p>
@@ -2102,10 +2102,9 @@
           </a:lstStyle>
           <a:p>
             <a:r>
-              <a:rPr lang="en-US" smtClean="0"/>
+              <a:rPr lang="en-US"/>
               <a:t>Click to edit Master title style</a:t>
             </a:r>
-            <a:endParaRPr lang="en-US"/>
           </a:p>
         </p:txBody>
       </p:sp>
@@ -2159,38 +2158,37 @@
           <a:p>
             <a:pPr lvl="0"/>
             <a:r>
-              <a:rPr lang="en-US" smtClean="0"/>
+              <a:rPr lang="en-US"/>
               <a:t>Click to edit Master text styles</a:t>
             </a:r>
           </a:p>
           <a:p>
             <a:pPr lvl="1"/>
             <a:r>
-              <a:rPr lang="en-US" smtClean="0"/>
+              <a:rPr lang="en-US"/>
               <a:t>Second level</a:t>
             </a:r>
           </a:p>
           <a:p>
             <a:pPr lvl="2"/>
             <a:r>
-              <a:rPr lang="en-US" smtClean="0"/>
+              <a:rPr lang="en-US"/>
               <a:t>Third level</a:t>
             </a:r>
           </a:p>
           <a:p>
             <a:pPr lvl="3"/>
             <a:r>
-              <a:rPr lang="en-US" smtClean="0"/>
+              <a:rPr lang="en-US"/>
               <a:t>Fourth level</a:t>
             </a:r>
           </a:p>
           <a:p>
             <a:pPr lvl="4"/>
             <a:r>
-              <a:rPr lang="en-US" smtClean="0"/>
+              <a:rPr lang="en-US"/>
               <a:t>Fifth level</a:t>
             </a:r>
-            <a:endParaRPr lang="en-US"/>
           </a:p>
         </p:txBody>
       </p:sp>
@@ -2253,7 +2251,7 @@
           <a:p>
             <a:pPr lvl="0"/>
             <a:r>
-              <a:rPr lang="en-US" smtClean="0"/>
+              <a:rPr lang="en-US"/>
               <a:t>Click to edit Master text styles</a:t>
             </a:r>
           </a:p>
@@ -2276,7 +2274,7 @@
           <a:p>
             <a:fld id="{5BCAD085-E8A6-8845-BD4E-CB4CCA059FC4}" type="datetimeFigureOut">
               <a:rPr lang="en-US" smtClean="0"/>
-              <a:t>1/27/13</a:t>
+              <a:t>6/21/2026</a:t>
             </a:fld>
             <a:endParaRPr lang="en-US"/>
           </a:p>
@@ -2379,10 +2377,9 @@
           </a:lstStyle>
           <a:p>
             <a:r>
-              <a:rPr lang="en-US" smtClean="0"/>
+              <a:rPr lang="en-US"/>
               <a:t>Click to edit Master title style</a:t>
             </a:r>
-            <a:endParaRPr lang="en-US"/>
           </a:p>
         </p:txBody>
       </p:sp>
@@ -2506,7 +2503,7 @@
           <a:p>
             <a:pPr lvl="0"/>
             <a:r>
-              <a:rPr lang="en-US" smtClean="0"/>
+              <a:rPr lang="en-US"/>
               <a:t>Click to edit Master text styles</a:t>
             </a:r>
           </a:p>
@@ -2529,7 +2526,7 @@
           <a:p>
             <a:fld id="{5BCAD085-E8A6-8845-BD4E-CB4CCA059FC4}" type="datetimeFigureOut">
               <a:rPr lang="en-US" smtClean="0"/>
-              <a:t>1/27/13</a:t>
+              <a:t>6/21/2026</a:t>
             </a:fld>
             <a:endParaRPr lang="en-US"/>
           </a:p>
@@ -2638,10 +2635,9 @@
           <a:lstStyle/>
           <a:p>
             <a:r>
-              <a:rPr lang="en-US" smtClean="0"/>
+              <a:rPr lang="en-US"/>
               <a:t>Click to edit Master title style</a:t>
             </a:r>
-            <a:endParaRPr lang="en-US"/>
           </a:p>
         </p:txBody>
       </p:sp>
@@ -2672,38 +2668,37 @@
           <a:p>
             <a:pPr lvl="0"/>
             <a:r>
-              <a:rPr lang="en-US" smtClean="0"/>
+              <a:rPr lang="en-US"/>
               <a:t>Click to edit Master text styles</a:t>
             </a:r>
           </a:p>
           <a:p>
             <a:pPr lvl="1"/>
             <a:r>
-              <a:rPr lang="en-US" smtClean="0"/>
+              <a:rPr lang="en-US"/>
               <a:t>Second level</a:t>
             </a:r>
           </a:p>
           <a:p>
             <a:pPr lvl="2"/>
             <a:r>
-              <a:rPr lang="en-US" smtClean="0"/>
+              <a:rPr lang="en-US"/>
               <a:t>Third level</a:t>
             </a:r>
           </a:p>
           <a:p>
             <a:pPr lvl="3"/>
             <a:r>
-              <a:rPr lang="en-US" smtClean="0"/>
+              <a:rPr lang="en-US"/>
               <a:t>Fourth level</a:t>
             </a:r>
           </a:p>
           <a:p>
             <a:pPr lvl="4"/>
             <a:r>
-              <a:rPr lang="en-US" smtClean="0"/>
+              <a:rPr lang="en-US"/>
               <a:t>Fifth level</a:t>
             </a:r>
-            <a:endParaRPr lang="en-US"/>
           </a:p>
         </p:txBody>
       </p:sp>
@@ -2742,7 +2737,7 @@
           <a:p>
             <a:fld id="{5BCAD085-E8A6-8845-BD4E-CB4CCA059FC4}" type="datetimeFigureOut">
               <a:rPr lang="en-US" smtClean="0"/>
-              <a:t>1/27/13</a:t>
+              <a:t>6/21/2026</a:t>
             </a:fld>
             <a:endParaRPr lang="en-US"/>
           </a:p>
@@ -3101,7 +3096,7 @@
 </file>
 
 <file path=ppt/slides/slide1.xml><?xml version="1.0" encoding="utf-8"?>
-<p:sld xmlns:a="http://schemas.openxmlformats.org/drawingml/2006/main" xmlns:p="http://schemas.openxmlformats.org/presentationml/2006/main" xmlns:r="http://schemas.openxmlformats.org/officeDocument/2006/relationships">
+<p:sld xmlns:a="http://schemas.openxmlformats.org/drawingml/2006/main" xmlns:r="http://schemas.openxmlformats.org/officeDocument/2006/relationships" xmlns:p="http://schemas.openxmlformats.org/presentationml/2006/main">
   <p:cSld>
     <p:spTree>
       <p:nvGrpSpPr>
@@ -3109,7 +3104,14 @@
         <p:cNvGrpSpPr/>
         <p:nvPr/>
       </p:nvGrpSpPr>
-      <p:grpSpPr/>
+      <p:grpSpPr>
+        <a:xfrm>
+          <a:off x="0" y="0"/>
+          <a:ext cx="0" cy="0"/>
+          <a:chOff x="0" y="0"/>
+          <a:chExt cx="0" cy="0"/>
+        </a:xfrm>
+      </p:grpSpPr>
       <p:sp>
         <p:nvSpPr>
           <p:cNvPr id="2" name="Rectangle 1"/>
@@ -3118,7 +3120,7 @@
         </p:nvSpPr>
         <p:spPr>
           <a:xfrm>
-            <a:off x="0" y="0"/>
+            <a:off x="0" y="-54864"/>
             <a:ext cx="12188952" cy="6858000"/>
           </a:xfrm>
           <a:prstGeom prst="rect">
@@ -3150,6 +3152,7 @@
           <a:lstStyle/>
           <a:p>
             <a:pPr algn="ctr"/>
+            <a:endParaRPr/>
           </a:p>
         </p:txBody>
       </p:sp>
@@ -3193,6 +3196,7 @@
           <a:lstStyle/>
           <a:p>
             <a:pPr algn="ctr"/>
+            <a:endParaRPr/>
           </a:p>
         </p:txBody>
       </p:sp>
@@ -3236,6 +3240,7 @@
           <a:lstStyle/>
           <a:p>
             <a:pPr algn="ctr"/>
+            <a:endParaRPr/>
           </a:p>
         </p:txBody>
       </p:sp>
@@ -3279,6 +3284,7 @@
           <a:lstStyle/>
           <a:p>
             <a:pPr algn="ctr"/>
+            <a:endParaRPr/>
           </a:p>
         </p:txBody>
       </p:sp>
@@ -3424,6 +3430,7 @@
           <a:lstStyle/>
           <a:p>
             <a:pPr algn="ctr"/>
+            <a:endParaRPr/>
           </a:p>
         </p:txBody>
       </p:sp>
@@ -3467,6 +3474,7 @@
           <a:lstStyle/>
           <a:p>
             <a:pPr algn="ctr"/>
+            <a:endParaRPr/>
           </a:p>
         </p:txBody>
       </p:sp>
@@ -3479,28 +3487,33 @@
         <p:spPr>
           <a:xfrm>
             <a:off x="685800" y="3493008"/>
-            <a:ext cx="1828800" cy="457200"/>
-          </a:xfrm>
-          <a:prstGeom prst="rect">
-            <a:avLst/>
-          </a:prstGeom>
-          <a:noFill/>
-        </p:spPr>
-        <p:txBody>
-          <a:bodyPr wrap="square">
-            <a:spAutoFit/>
-          </a:bodyPr>
-          <a:lstStyle/>
-          <a:p>
-            <a:pPr algn="l"/>
-            <a:r>
-              <a:rPr sz="1000" b="0" i="0">
+            <a:ext cx="1828800" cy="246221"/>
+          </a:xfrm>
+          <a:prstGeom prst="rect">
+            <a:avLst/>
+          </a:prstGeom>
+          <a:noFill/>
+        </p:spPr>
+        <p:txBody>
+          <a:bodyPr wrap="square">
+            <a:spAutoFit/>
+          </a:bodyPr>
+          <a:lstStyle/>
+          <a:p>
+            <a:pPr algn="l"/>
+            <a:r>
+              <a:rPr lang="ko-KR" altLang="en-US" sz="1000" dirty="0">
                 <a:solidFill>
                   <a:srgbClr val="AABBDD"/>
                 </a:solidFill>
               </a:rPr>
-              <a:t>학교</a:t>
-            </a:r>
+              <a:t>팀원</a:t>
+            </a:r>
+            <a:endParaRPr sz="1000" b="0" i="0" dirty="0">
+              <a:solidFill>
+                <a:srgbClr val="AABBDD"/>
+              </a:solidFill>
+            </a:endParaRPr>
           </a:p>
         </p:txBody>
       </p:sp>
@@ -3513,28 +3526,57 @@
         <p:spPr>
           <a:xfrm>
             <a:off x="2560320" y="3493008"/>
-            <a:ext cx="7772400" cy="457200"/>
-          </a:xfrm>
-          <a:prstGeom prst="rect">
-            <a:avLst/>
-          </a:prstGeom>
-          <a:noFill/>
-        </p:spPr>
-        <p:txBody>
-          <a:bodyPr wrap="square">
-            <a:spAutoFit/>
-          </a:bodyPr>
-          <a:lstStyle/>
-          <a:p>
-            <a:pPr algn="l"/>
-            <a:r>
-              <a:rPr sz="1100" b="0" i="0">
-                <a:solidFill>
-                  <a:srgbClr val="FFFFFF"/>
-                </a:solidFill>
-              </a:rPr>
-              <a:t/>
-            </a:r>
+            <a:ext cx="7772400" cy="369332"/>
+          </a:xfrm>
+          <a:prstGeom prst="rect">
+            <a:avLst/>
+          </a:prstGeom>
+          <a:noFill/>
+        </p:spPr>
+        <p:txBody>
+          <a:bodyPr wrap="square">
+            <a:spAutoFit/>
+          </a:bodyPr>
+          <a:lstStyle/>
+          <a:p>
+            <a:pPr algn="l"/>
+            <a:r>
+              <a:rPr lang="en-US" dirty="0">
+                <a:solidFill>
+                  <a:schemeClr val="bg1"/>
+                </a:solidFill>
+              </a:rPr>
+              <a:t>202312115 </a:t>
+            </a:r>
+            <a:r>
+              <a:rPr lang="ko-KR" altLang="en-US" dirty="0">
+                <a:solidFill>
+                  <a:schemeClr val="bg1"/>
+                </a:solidFill>
+              </a:rPr>
+              <a:t>김우진</a:t>
+            </a:r>
+            <a:r>
+              <a:rPr lang="en-US" altLang="ko-KR" dirty="0">
+                <a:solidFill>
+                  <a:schemeClr val="bg1"/>
+                </a:solidFill>
+              </a:rPr>
+              <a:t>, 202312120 </a:t>
+            </a:r>
+            <a:r>
+              <a:rPr lang="ko-KR" altLang="en-US" dirty="0">
+                <a:solidFill>
+                  <a:schemeClr val="bg1"/>
+                </a:solidFill>
+              </a:rPr>
+              <a:t>김태연</a:t>
+            </a:r>
+            <a:endParaRPr dirty="0">
+              <a:solidFill>
+                <a:schemeClr val="bg1"/>
+              </a:solidFill>
+            </a:endParaRPr>
           </a:p>
         </p:txBody>
       </p:sp>
@@ -3578,6 +3620,7 @@
           <a:lstStyle/>
           <a:p>
             <a:pPr algn="ctr"/>
+            <a:endParaRPr/>
           </a:p>
         </p:txBody>
       </p:sp>
@@ -3624,139 +3667,57 @@
         <p:spPr>
           <a:xfrm>
             <a:off x="2560320" y="4178808"/>
-            <a:ext cx="7772400" cy="457200"/>
-          </a:xfrm>
-          <a:prstGeom prst="rect">
-            <a:avLst/>
-          </a:prstGeom>
-          <a:noFill/>
-        </p:spPr>
-        <p:txBody>
-          <a:bodyPr wrap="square">
-            <a:spAutoFit/>
-          </a:bodyPr>
-          <a:lstStyle/>
-          <a:p>
-            <a:pPr algn="l"/>
-            <a:r>
-              <a:rPr sz="1100" b="0" i="0">
-                <a:solidFill>
-                  <a:srgbClr val="FFFFFF"/>
-                </a:solidFill>
-              </a:rPr>
-              <a:t/>
-            </a:r>
-          </a:p>
-        </p:txBody>
-      </p:sp>
-      <p:sp>
-        <p:nvSpPr>
-          <p:cNvPr id="16" name="Rectangle 15"/>
-          <p:cNvSpPr/>
-          <p:nvPr/>
-        </p:nvSpPr>
-        <p:spPr>
-          <a:xfrm>
-            <a:off x="502920" y="4800600"/>
-            <a:ext cx="10058400" cy="594360"/>
-          </a:xfrm>
-          <a:prstGeom prst="rect">
-            <a:avLst/>
-          </a:prstGeom>
-          <a:solidFill>
-            <a:srgbClr val="1D2A45"/>
-          </a:solidFill>
-          <a:ln>
-            <a:noFill/>
-          </a:ln>
-        </p:spPr>
-        <p:style>
-          <a:lnRef idx="1">
-            <a:schemeClr val="accent1"/>
-          </a:lnRef>
-          <a:fillRef idx="3">
-            <a:schemeClr val="accent1"/>
-          </a:fillRef>
-          <a:effectRef idx="2">
-            <a:schemeClr val="accent1"/>
-          </a:effectRef>
-          <a:fontRef idx="minor">
-            <a:schemeClr val="lt1"/>
-          </a:fontRef>
-        </p:style>
-        <p:txBody>
-          <a:bodyPr rtlCol="0" anchor="ctr"/>
-          <a:lstStyle/>
-          <a:p>
-            <a:pPr algn="ctr"/>
-          </a:p>
-        </p:txBody>
-      </p:sp>
-      <p:sp>
-        <p:nvSpPr>
-          <p:cNvPr id="17" name="TextBox 16"/>
-          <p:cNvSpPr txBox="1"/>
-          <p:nvPr/>
-        </p:nvSpPr>
-        <p:spPr>
-          <a:xfrm>
-            <a:off x="685800" y="4864608"/>
-            <a:ext cx="1828800" cy="457200"/>
-          </a:xfrm>
-          <a:prstGeom prst="rect">
-            <a:avLst/>
-          </a:prstGeom>
-          <a:noFill/>
-        </p:spPr>
-        <p:txBody>
-          <a:bodyPr wrap="square">
-            <a:spAutoFit/>
-          </a:bodyPr>
-          <a:lstStyle/>
-          <a:p>
-            <a:pPr algn="l"/>
-            <a:r>
-              <a:rPr sz="1000" b="0" i="0">
-                <a:solidFill>
-                  <a:srgbClr val="AABBDD"/>
-                </a:solidFill>
-              </a:rPr>
-              <a:t>팀원</a:t>
-            </a:r>
-          </a:p>
-        </p:txBody>
-      </p:sp>
-      <p:sp>
-        <p:nvSpPr>
-          <p:cNvPr id="18" name="TextBox 17"/>
-          <p:cNvSpPr txBox="1"/>
-          <p:nvPr/>
-        </p:nvSpPr>
-        <p:spPr>
-          <a:xfrm>
-            <a:off x="2560320" y="4864608"/>
-            <a:ext cx="7772400" cy="457200"/>
-          </a:xfrm>
-          <a:prstGeom prst="rect">
-            <a:avLst/>
-          </a:prstGeom>
-          <a:noFill/>
-        </p:spPr>
-        <p:txBody>
-          <a:bodyPr wrap="square">
-            <a:spAutoFit/>
-          </a:bodyPr>
-          <a:lstStyle/>
-          <a:p>
-            <a:pPr algn="l"/>
-            <a:r>
-              <a:rPr sz="1100" b="0" i="0">
-                <a:solidFill>
-                  <a:srgbClr val="FFFFFF"/>
-                </a:solidFill>
-              </a:rPr>
-              <a:t/>
-            </a:r>
+            <a:ext cx="7772400" cy="369332"/>
+          </a:xfrm>
+          <a:prstGeom prst="rect">
+            <a:avLst/>
+          </a:prstGeom>
+          <a:noFill/>
+        </p:spPr>
+        <p:txBody>
+          <a:bodyPr wrap="square">
+            <a:spAutoFit/>
+          </a:bodyPr>
+          <a:lstStyle/>
+          <a:p>
+            <a:pPr algn="l"/>
+            <a:r>
+              <a:rPr lang="ko-KR" altLang="en-US" dirty="0">
+                <a:solidFill>
+                  <a:schemeClr val="bg1"/>
+                </a:solidFill>
+              </a:rPr>
+              <a:t>물리학과 </a:t>
+            </a:r>
+            <a:r>
+              <a:rPr lang="en-US" altLang="ko-KR" dirty="0">
+                <a:solidFill>
+                  <a:schemeClr val="bg1"/>
+                </a:solidFill>
+              </a:rPr>
+              <a:t>AI </a:t>
+            </a:r>
+            <a:r>
+              <a:rPr lang="ko-KR" altLang="en-US" dirty="0">
+                <a:solidFill>
+                  <a:schemeClr val="bg1"/>
+                </a:solidFill>
+              </a:rPr>
+              <a:t>와 </a:t>
+            </a:r>
+            <a:r>
+              <a:rPr lang="ko-KR" altLang="en-US" dirty="0" err="1">
+                <a:solidFill>
+                  <a:schemeClr val="bg1"/>
+                </a:solidFill>
+              </a:rPr>
+              <a:t>머신러닝</a:t>
+            </a:r>
+            <a:endParaRPr dirty="0">
+              <a:solidFill>
+                <a:schemeClr val="bg1"/>
+              </a:solidFill>
+            </a:endParaRPr>
           </a:p>
         </p:txBody>
       </p:sp>
@@ -3803,7 +3764,7 @@
 </file>
 
 <file path=ppt/slides/slide10.xml><?xml version="1.0" encoding="utf-8"?>
-<p:sld xmlns:a="http://schemas.openxmlformats.org/drawingml/2006/main" xmlns:p="http://schemas.openxmlformats.org/presentationml/2006/main" xmlns:r="http://schemas.openxmlformats.org/officeDocument/2006/relationships">
+<p:sld xmlns:a="http://schemas.openxmlformats.org/drawingml/2006/main" xmlns:r="http://schemas.openxmlformats.org/officeDocument/2006/relationships" xmlns:p="http://schemas.openxmlformats.org/presentationml/2006/main">
   <p:cSld>
     <p:spTree>
       <p:nvGrpSpPr>
@@ -3811,7 +3772,14 @@
         <p:cNvGrpSpPr/>
         <p:nvPr/>
       </p:nvGrpSpPr>
-      <p:grpSpPr/>
+      <p:grpSpPr>
+        <a:xfrm>
+          <a:off x="0" y="0"/>
+          <a:ext cx="0" cy="0"/>
+          <a:chOff x="0" y="0"/>
+          <a:chExt cx="0" cy="0"/>
+        </a:xfrm>
+      </p:grpSpPr>
       <p:sp>
         <p:nvSpPr>
           <p:cNvPr id="2" name="Rectangle 1"/>
@@ -3852,6 +3820,7 @@
           <a:lstStyle/>
           <a:p>
             <a:pPr algn="ctr"/>
+            <a:endParaRPr/>
           </a:p>
         </p:txBody>
       </p:sp>
@@ -3895,6 +3864,7 @@
           <a:lstStyle/>
           <a:p>
             <a:pPr algn="ctr"/>
+            <a:endParaRPr/>
           </a:p>
         </p:txBody>
       </p:sp>
@@ -4006,6 +3976,7 @@
           <a:lstStyle/>
           <a:p>
             <a:pPr algn="ctr"/>
+            <a:endParaRPr/>
           </a:p>
         </p:txBody>
       </p:sp>
@@ -4117,6 +4088,7 @@
           <a:lstStyle/>
           <a:p>
             <a:pPr algn="ctr"/>
+            <a:endParaRPr/>
           </a:p>
         </p:txBody>
       </p:sp>
@@ -4228,6 +4200,7 @@
           <a:lstStyle/>
           <a:p>
             <a:pPr algn="ctr"/>
+            <a:endParaRPr/>
           </a:p>
         </p:txBody>
       </p:sp>
@@ -4305,6 +4278,7 @@
           <a:lstStyle/>
           <a:p>
             <a:pPr algn="ctr"/>
+            <a:endParaRPr/>
           </a:p>
         </p:txBody>
       </p:sp>
@@ -4416,6 +4390,7 @@
           <a:lstStyle/>
           <a:p>
             <a:pPr algn="ctr"/>
+            <a:endParaRPr/>
           </a:p>
         </p:txBody>
       </p:sp>
@@ -4527,6 +4502,7 @@
           <a:lstStyle/>
           <a:p>
             <a:pPr algn="ctr"/>
+            <a:endParaRPr/>
           </a:p>
         </p:txBody>
       </p:sp>
@@ -4638,6 +4614,7 @@
           <a:lstStyle/>
           <a:p>
             <a:pPr algn="ctr"/>
+            <a:endParaRPr/>
           </a:p>
         </p:txBody>
       </p:sp>
@@ -4749,6 +4726,7 @@
           <a:lstStyle/>
           <a:p>
             <a:pPr algn="ctr"/>
+            <a:endParaRPr/>
           </a:p>
         </p:txBody>
       </p:sp>
@@ -4826,6 +4804,7 @@
           <a:lstStyle/>
           <a:p>
             <a:pPr algn="ctr"/>
+            <a:endParaRPr/>
           </a:p>
         </p:txBody>
       </p:sp>
@@ -4937,6 +4916,7 @@
           <a:lstStyle/>
           <a:p>
             <a:pPr algn="ctr"/>
+            <a:endParaRPr/>
           </a:p>
         </p:txBody>
       </p:sp>
@@ -5048,6 +5028,7 @@
           <a:lstStyle/>
           <a:p>
             <a:pPr algn="ctr"/>
+            <a:endParaRPr/>
           </a:p>
         </p:txBody>
       </p:sp>
@@ -5159,6 +5140,7 @@
           <a:lstStyle/>
           <a:p>
             <a:pPr algn="ctr"/>
+            <a:endParaRPr/>
           </a:p>
         </p:txBody>
       </p:sp>
@@ -5236,6 +5218,7 @@
           <a:lstStyle/>
           <a:p>
             <a:pPr algn="ctr"/>
+            <a:endParaRPr/>
           </a:p>
         </p:txBody>
       </p:sp>
@@ -5347,6 +5330,7 @@
           <a:lstStyle/>
           <a:p>
             <a:pPr algn="ctr"/>
+            <a:endParaRPr/>
           </a:p>
         </p:txBody>
       </p:sp>
@@ -5458,6 +5442,7 @@
           <a:lstStyle/>
           <a:p>
             <a:pPr algn="ctr"/>
+            <a:endParaRPr/>
           </a:p>
         </p:txBody>
       </p:sp>
@@ -5569,6 +5554,7 @@
           <a:lstStyle/>
           <a:p>
             <a:pPr algn="ctr"/>
+            <a:endParaRPr/>
           </a:p>
         </p:txBody>
       </p:sp>
@@ -5680,6 +5666,7 @@
           <a:lstStyle/>
           <a:p>
             <a:pPr algn="ctr"/>
+            <a:endParaRPr/>
           </a:p>
         </p:txBody>
       </p:sp>
@@ -5791,6 +5778,7 @@
           <a:lstStyle/>
           <a:p>
             <a:pPr algn="ctr"/>
+            <a:endParaRPr/>
           </a:p>
         </p:txBody>
       </p:sp>
@@ -5868,6 +5856,7 @@
           <a:lstStyle/>
           <a:p>
             <a:pPr algn="ctr"/>
+            <a:endParaRPr/>
           </a:p>
         </p:txBody>
       </p:sp>
@@ -5948,7 +5937,7 @@
 </file>
 
 <file path=ppt/slides/slide11.xml><?xml version="1.0" encoding="utf-8"?>
-<p:sld xmlns:a="http://schemas.openxmlformats.org/drawingml/2006/main" xmlns:p="http://schemas.openxmlformats.org/presentationml/2006/main" xmlns:r="http://schemas.openxmlformats.org/officeDocument/2006/relationships">
+<p:sld xmlns:a="http://schemas.openxmlformats.org/drawingml/2006/main" xmlns:r="http://schemas.openxmlformats.org/officeDocument/2006/relationships" xmlns:p="http://schemas.openxmlformats.org/presentationml/2006/main">
   <p:cSld>
     <p:spTree>
       <p:nvGrpSpPr>
@@ -5956,7 +5945,14 @@
         <p:cNvGrpSpPr/>
         <p:nvPr/>
       </p:nvGrpSpPr>
-      <p:grpSpPr/>
+      <p:grpSpPr>
+        <a:xfrm>
+          <a:off x="0" y="0"/>
+          <a:ext cx="0" cy="0"/>
+          <a:chOff x="0" y="0"/>
+          <a:chExt cx="0" cy="0"/>
+        </a:xfrm>
+      </p:grpSpPr>
       <p:sp>
         <p:nvSpPr>
           <p:cNvPr id="2" name="Rectangle 1"/>
@@ -5997,6 +5993,7 @@
           <a:lstStyle/>
           <a:p>
             <a:pPr algn="ctr"/>
+            <a:endParaRPr/>
           </a:p>
         </p:txBody>
       </p:sp>
@@ -6040,6 +6037,7 @@
           <a:lstStyle/>
           <a:p>
             <a:pPr algn="ctr"/>
+            <a:endParaRPr/>
           </a:p>
         </p:txBody>
       </p:sp>
@@ -6189,7 +6187,7 @@
 </file>
 
 <file path=ppt/slides/slide12.xml><?xml version="1.0" encoding="utf-8"?>
-<p:sld xmlns:a="http://schemas.openxmlformats.org/drawingml/2006/main" xmlns:p="http://schemas.openxmlformats.org/presentationml/2006/main" xmlns:r="http://schemas.openxmlformats.org/officeDocument/2006/relationships">
+<p:sld xmlns:a="http://schemas.openxmlformats.org/drawingml/2006/main" xmlns:r="http://schemas.openxmlformats.org/officeDocument/2006/relationships" xmlns:p="http://schemas.openxmlformats.org/presentationml/2006/main">
   <p:cSld>
     <p:spTree>
       <p:nvGrpSpPr>
@@ -6197,7 +6195,14 @@
         <p:cNvGrpSpPr/>
         <p:nvPr/>
       </p:nvGrpSpPr>
-      <p:grpSpPr/>
+      <p:grpSpPr>
+        <a:xfrm>
+          <a:off x="0" y="0"/>
+          <a:ext cx="0" cy="0"/>
+          <a:chOff x="0" y="0"/>
+          <a:chExt cx="0" cy="0"/>
+        </a:xfrm>
+      </p:grpSpPr>
       <p:sp>
         <p:nvSpPr>
           <p:cNvPr id="2" name="Rectangle 1"/>
@@ -6238,6 +6243,7 @@
           <a:lstStyle/>
           <a:p>
             <a:pPr algn="ctr"/>
+            <a:endParaRPr/>
           </a:p>
         </p:txBody>
       </p:sp>
@@ -6281,6 +6287,7 @@
           <a:lstStyle/>
           <a:p>
             <a:pPr algn="ctr"/>
+            <a:endParaRPr/>
           </a:p>
         </p:txBody>
       </p:sp>
@@ -6392,6 +6399,7 @@
           <a:lstStyle/>
           <a:p>
             <a:pPr algn="ctr"/>
+            <a:endParaRPr/>
           </a:p>
         </p:txBody>
       </p:sp>
@@ -6503,6 +6511,7 @@
           <a:lstStyle/>
           <a:p>
             <a:pPr algn="ctr"/>
+            <a:endParaRPr/>
           </a:p>
         </p:txBody>
       </p:sp>
@@ -6716,6 +6725,7 @@
           <a:lstStyle/>
           <a:p>
             <a:pPr algn="ctr"/>
+            <a:endParaRPr/>
           </a:p>
         </p:txBody>
       </p:sp>
@@ -6759,6 +6769,7 @@
           <a:lstStyle/>
           <a:p>
             <a:pPr algn="ctr"/>
+            <a:endParaRPr/>
           </a:p>
         </p:txBody>
       </p:sp>
@@ -6972,6 +6983,7 @@
           <a:lstStyle/>
           <a:p>
             <a:pPr algn="ctr"/>
+            <a:endParaRPr/>
           </a:p>
         </p:txBody>
       </p:sp>
@@ -7015,6 +7027,7 @@
           <a:lstStyle/>
           <a:p>
             <a:pPr algn="ctr"/>
+            <a:endParaRPr/>
           </a:p>
         </p:txBody>
       </p:sp>
@@ -7228,6 +7241,7 @@
           <a:lstStyle/>
           <a:p>
             <a:pPr algn="ctr"/>
+            <a:endParaRPr/>
           </a:p>
         </p:txBody>
       </p:sp>
@@ -7271,6 +7285,7 @@
           <a:lstStyle/>
           <a:p>
             <a:pPr algn="ctr"/>
+            <a:endParaRPr/>
           </a:p>
         </p:txBody>
       </p:sp>
@@ -7484,6 +7499,7 @@
           <a:lstStyle/>
           <a:p>
             <a:pPr algn="ctr"/>
+            <a:endParaRPr/>
           </a:p>
         </p:txBody>
       </p:sp>
@@ -7527,6 +7543,7 @@
           <a:lstStyle/>
           <a:p>
             <a:pPr algn="ctr"/>
+            <a:endParaRPr/>
           </a:p>
         </p:txBody>
       </p:sp>
@@ -7740,6 +7757,7 @@
           <a:lstStyle/>
           <a:p>
             <a:pPr algn="ctr"/>
+            <a:endParaRPr/>
           </a:p>
         </p:txBody>
       </p:sp>
@@ -7783,6 +7801,7 @@
           <a:lstStyle/>
           <a:p>
             <a:pPr algn="ctr"/>
+            <a:endParaRPr/>
           </a:p>
         </p:txBody>
       </p:sp>
@@ -7996,6 +8015,7 @@
           <a:lstStyle/>
           <a:p>
             <a:pPr algn="ctr"/>
+            <a:endParaRPr/>
           </a:p>
         </p:txBody>
       </p:sp>
@@ -8039,6 +8059,7 @@
           <a:lstStyle/>
           <a:p>
             <a:pPr algn="ctr"/>
+            <a:endParaRPr/>
           </a:p>
         </p:txBody>
       </p:sp>
@@ -8252,6 +8273,7 @@
           <a:lstStyle/>
           <a:p>
             <a:pPr algn="ctr"/>
+            <a:endParaRPr/>
           </a:p>
         </p:txBody>
       </p:sp>
@@ -8333,7 +8355,7 @@
 </file>
 
 <file path=ppt/slides/slide13.xml><?xml version="1.0" encoding="utf-8"?>
-<p:sld xmlns:a="http://schemas.openxmlformats.org/drawingml/2006/main" xmlns:p="http://schemas.openxmlformats.org/presentationml/2006/main" xmlns:r="http://schemas.openxmlformats.org/officeDocument/2006/relationships">
+<p:sld xmlns:a="http://schemas.openxmlformats.org/drawingml/2006/main" xmlns:r="http://schemas.openxmlformats.org/officeDocument/2006/relationships" xmlns:p="http://schemas.openxmlformats.org/presentationml/2006/main">
   <p:cSld>
     <p:spTree>
       <p:nvGrpSpPr>
@@ -8341,7 +8363,14 @@
         <p:cNvGrpSpPr/>
         <p:nvPr/>
       </p:nvGrpSpPr>
-      <p:grpSpPr/>
+      <p:grpSpPr>
+        <a:xfrm>
+          <a:off x="0" y="0"/>
+          <a:ext cx="0" cy="0"/>
+          <a:chOff x="0" y="0"/>
+          <a:chExt cx="0" cy="0"/>
+        </a:xfrm>
+      </p:grpSpPr>
       <p:sp>
         <p:nvSpPr>
           <p:cNvPr id="2" name="Rectangle 1"/>
@@ -8382,6 +8411,7 @@
           <a:lstStyle/>
           <a:p>
             <a:pPr algn="ctr"/>
+            <a:endParaRPr/>
           </a:p>
         </p:txBody>
       </p:sp>
@@ -8425,6 +8455,7 @@
           <a:lstStyle/>
           <a:p>
             <a:pPr algn="ctr"/>
+            <a:endParaRPr/>
           </a:p>
         </p:txBody>
       </p:sp>
@@ -8574,7 +8605,7 @@
 </file>
 
 <file path=ppt/slides/slide14.xml><?xml version="1.0" encoding="utf-8"?>
-<p:sld xmlns:a="http://schemas.openxmlformats.org/drawingml/2006/main" xmlns:p="http://schemas.openxmlformats.org/presentationml/2006/main" xmlns:r="http://schemas.openxmlformats.org/officeDocument/2006/relationships">
+<p:sld xmlns:a="http://schemas.openxmlformats.org/drawingml/2006/main" xmlns:r="http://schemas.openxmlformats.org/officeDocument/2006/relationships" xmlns:p="http://schemas.openxmlformats.org/presentationml/2006/main">
   <p:cSld>
     <p:spTree>
       <p:nvGrpSpPr>
@@ -8582,7 +8613,14 @@
         <p:cNvGrpSpPr/>
         <p:nvPr/>
       </p:nvGrpSpPr>
-      <p:grpSpPr/>
+      <p:grpSpPr>
+        <a:xfrm>
+          <a:off x="0" y="0"/>
+          <a:ext cx="0" cy="0"/>
+          <a:chOff x="0" y="0"/>
+          <a:chExt cx="0" cy="0"/>
+        </a:xfrm>
+      </p:grpSpPr>
       <p:sp>
         <p:nvSpPr>
           <p:cNvPr id="2" name="Rectangle 1"/>
@@ -8623,6 +8661,7 @@
           <a:lstStyle/>
           <a:p>
             <a:pPr algn="ctr"/>
+            <a:endParaRPr/>
           </a:p>
         </p:txBody>
       </p:sp>
@@ -8666,6 +8705,7 @@
           <a:lstStyle/>
           <a:p>
             <a:pPr algn="ctr"/>
+            <a:endParaRPr/>
           </a:p>
         </p:txBody>
       </p:sp>
@@ -8777,6 +8817,7 @@
           <a:lstStyle/>
           <a:p>
             <a:pPr algn="ctr"/>
+            <a:endParaRPr/>
           </a:p>
         </p:txBody>
       </p:sp>
@@ -8888,6 +8929,7 @@
           <a:lstStyle/>
           <a:p>
             <a:pPr algn="ctr"/>
+            <a:endParaRPr/>
           </a:p>
         </p:txBody>
       </p:sp>
@@ -8931,6 +8973,7 @@
           <a:lstStyle/>
           <a:p>
             <a:pPr algn="ctr"/>
+            <a:endParaRPr/>
           </a:p>
         </p:txBody>
       </p:sp>
@@ -9113,6 +9156,7 @@
           <a:lstStyle/>
           <a:p>
             <a:pPr algn="ctr"/>
+            <a:endParaRPr/>
           </a:p>
         </p:txBody>
       </p:sp>
@@ -9156,6 +9200,7 @@
           <a:lstStyle/>
           <a:p>
             <a:pPr algn="ctr"/>
+            <a:endParaRPr/>
           </a:p>
         </p:txBody>
       </p:sp>
@@ -9338,6 +9383,7 @@
           <a:lstStyle/>
           <a:p>
             <a:pPr algn="ctr"/>
+            <a:endParaRPr/>
           </a:p>
         </p:txBody>
       </p:sp>
@@ -9381,6 +9427,7 @@
           <a:lstStyle/>
           <a:p>
             <a:pPr algn="ctr"/>
+            <a:endParaRPr/>
           </a:p>
         </p:txBody>
       </p:sp>
@@ -9563,6 +9610,7 @@
           <a:lstStyle/>
           <a:p>
             <a:pPr algn="ctr"/>
+            <a:endParaRPr/>
           </a:p>
         </p:txBody>
       </p:sp>
@@ -9606,6 +9654,7 @@
           <a:lstStyle/>
           <a:p>
             <a:pPr algn="ctr"/>
+            <a:endParaRPr/>
           </a:p>
         </p:txBody>
       </p:sp>
@@ -9788,6 +9837,7 @@
           <a:lstStyle/>
           <a:p>
             <a:pPr algn="ctr"/>
+            <a:endParaRPr/>
           </a:p>
         </p:txBody>
       </p:sp>
@@ -9831,6 +9881,7 @@
           <a:lstStyle/>
           <a:p>
             <a:pPr algn="ctr"/>
+            <a:endParaRPr/>
           </a:p>
         </p:txBody>
       </p:sp>
@@ -10013,6 +10064,7 @@
           <a:lstStyle/>
           <a:p>
             <a:pPr algn="ctr"/>
+            <a:endParaRPr/>
           </a:p>
         </p:txBody>
       </p:sp>
@@ -10056,6 +10108,7 @@
           <a:lstStyle/>
           <a:p>
             <a:pPr algn="ctr"/>
+            <a:endParaRPr/>
           </a:p>
         </p:txBody>
       </p:sp>
@@ -10204,6 +10257,7 @@
           <a:lstStyle/>
           <a:p>
             <a:pPr algn="ctr"/>
+            <a:endParaRPr/>
           </a:p>
         </p:txBody>
       </p:sp>
@@ -10250,7 +10304,7 @@
 </file>
 
 <file path=ppt/slides/slide15.xml><?xml version="1.0" encoding="utf-8"?>
-<p:sld xmlns:a="http://schemas.openxmlformats.org/drawingml/2006/main" xmlns:p="http://schemas.openxmlformats.org/presentationml/2006/main" xmlns:r="http://schemas.openxmlformats.org/officeDocument/2006/relationships">
+<p:sld xmlns:a="http://schemas.openxmlformats.org/drawingml/2006/main" xmlns:r="http://schemas.openxmlformats.org/officeDocument/2006/relationships" xmlns:p="http://schemas.openxmlformats.org/presentationml/2006/main">
   <p:cSld>
     <p:spTree>
       <p:nvGrpSpPr>
@@ -10258,7 +10312,14 @@
         <p:cNvGrpSpPr/>
         <p:nvPr/>
       </p:nvGrpSpPr>
-      <p:grpSpPr/>
+      <p:grpSpPr>
+        <a:xfrm>
+          <a:off x="0" y="0"/>
+          <a:ext cx="0" cy="0"/>
+          <a:chOff x="0" y="0"/>
+          <a:chExt cx="0" cy="0"/>
+        </a:xfrm>
+      </p:grpSpPr>
       <p:sp>
         <p:nvSpPr>
           <p:cNvPr id="2" name="Rectangle 1"/>
@@ -10299,6 +10360,7 @@
           <a:lstStyle/>
           <a:p>
             <a:pPr algn="ctr"/>
+            <a:endParaRPr/>
           </a:p>
         </p:txBody>
       </p:sp>
@@ -10342,6 +10404,7 @@
           <a:lstStyle/>
           <a:p>
             <a:pPr algn="ctr"/>
+            <a:endParaRPr/>
           </a:p>
         </p:txBody>
       </p:sp>
@@ -10491,7 +10554,7 @@
 </file>
 
 <file path=ppt/slides/slide16.xml><?xml version="1.0" encoding="utf-8"?>
-<p:sld xmlns:a="http://schemas.openxmlformats.org/drawingml/2006/main" xmlns:p="http://schemas.openxmlformats.org/presentationml/2006/main" xmlns:r="http://schemas.openxmlformats.org/officeDocument/2006/relationships">
+<p:sld xmlns:a="http://schemas.openxmlformats.org/drawingml/2006/main" xmlns:r="http://schemas.openxmlformats.org/officeDocument/2006/relationships" xmlns:p="http://schemas.openxmlformats.org/presentationml/2006/main">
   <p:cSld>
     <p:spTree>
       <p:nvGrpSpPr>
@@ -10499,7 +10562,14 @@
         <p:cNvGrpSpPr/>
         <p:nvPr/>
       </p:nvGrpSpPr>
-      <p:grpSpPr/>
+      <p:grpSpPr>
+        <a:xfrm>
+          <a:off x="0" y="0"/>
+          <a:ext cx="0" cy="0"/>
+          <a:chOff x="0" y="0"/>
+          <a:chExt cx="0" cy="0"/>
+        </a:xfrm>
+      </p:grpSpPr>
       <p:sp>
         <p:nvSpPr>
           <p:cNvPr id="2" name="Rectangle 1"/>
@@ -10540,6 +10610,7 @@
           <a:lstStyle/>
           <a:p>
             <a:pPr algn="ctr"/>
+            <a:endParaRPr/>
           </a:p>
         </p:txBody>
       </p:sp>
@@ -10583,6 +10654,7 @@
           <a:lstStyle/>
           <a:p>
             <a:pPr algn="ctr"/>
+            <a:endParaRPr/>
           </a:p>
         </p:txBody>
       </p:sp>
@@ -10694,6 +10766,7 @@
           <a:lstStyle/>
           <a:p>
             <a:pPr algn="ctr"/>
+            <a:endParaRPr/>
           </a:p>
         </p:txBody>
       </p:sp>
@@ -10805,6 +10878,7 @@
           <a:lstStyle/>
           <a:p>
             <a:pPr algn="ctr"/>
+            <a:endParaRPr/>
           </a:p>
         </p:txBody>
       </p:sp>
@@ -10882,6 +10956,7 @@
           <a:lstStyle/>
           <a:p>
             <a:pPr algn="ctr"/>
+            <a:endParaRPr/>
           </a:p>
         </p:txBody>
       </p:sp>
@@ -10993,6 +11068,7 @@
           <a:lstStyle/>
           <a:p>
             <a:pPr algn="ctr"/>
+            <a:endParaRPr/>
           </a:p>
         </p:txBody>
       </p:sp>
@@ -11104,6 +11180,7 @@
           <a:lstStyle/>
           <a:p>
             <a:pPr algn="ctr"/>
+            <a:endParaRPr/>
           </a:p>
         </p:txBody>
       </p:sp>
@@ -11215,6 +11292,7 @@
           <a:lstStyle/>
           <a:p>
             <a:pPr algn="ctr"/>
+            <a:endParaRPr/>
           </a:p>
         </p:txBody>
       </p:sp>
@@ -11326,6 +11404,7 @@
           <a:lstStyle/>
           <a:p>
             <a:pPr algn="ctr"/>
+            <a:endParaRPr/>
           </a:p>
         </p:txBody>
       </p:sp>
@@ -11437,6 +11516,7 @@
           <a:lstStyle/>
           <a:p>
             <a:pPr algn="ctr"/>
+            <a:endParaRPr/>
           </a:p>
         </p:txBody>
       </p:sp>
@@ -11548,6 +11628,7 @@
           <a:lstStyle/>
           <a:p>
             <a:pPr algn="ctr"/>
+            <a:endParaRPr/>
           </a:p>
         </p:txBody>
       </p:sp>
@@ -11659,6 +11740,7 @@
           <a:lstStyle/>
           <a:p>
             <a:pPr algn="ctr"/>
+            <a:endParaRPr/>
           </a:p>
         </p:txBody>
       </p:sp>
@@ -11736,6 +11818,7 @@
           <a:lstStyle/>
           <a:p>
             <a:pPr algn="ctr"/>
+            <a:endParaRPr/>
           </a:p>
         </p:txBody>
       </p:sp>
@@ -11847,6 +11930,7 @@
           <a:lstStyle/>
           <a:p>
             <a:pPr algn="ctr"/>
+            <a:endParaRPr/>
           </a:p>
         </p:txBody>
       </p:sp>
@@ -11958,6 +12042,7 @@
           <a:lstStyle/>
           <a:p>
             <a:pPr algn="ctr"/>
+            <a:endParaRPr/>
           </a:p>
         </p:txBody>
       </p:sp>
@@ -12069,6 +12154,7 @@
           <a:lstStyle/>
           <a:p>
             <a:pPr algn="ctr"/>
+            <a:endParaRPr/>
           </a:p>
         </p:txBody>
       </p:sp>
@@ -12180,6 +12266,7 @@
           <a:lstStyle/>
           <a:p>
             <a:pPr algn="ctr"/>
+            <a:endParaRPr/>
           </a:p>
         </p:txBody>
       </p:sp>
@@ -12291,6 +12378,7 @@
           <a:lstStyle/>
           <a:p>
             <a:pPr algn="ctr"/>
+            <a:endParaRPr/>
           </a:p>
         </p:txBody>
       </p:sp>
@@ -12402,6 +12490,7 @@
           <a:lstStyle/>
           <a:p>
             <a:pPr algn="ctr"/>
+            <a:endParaRPr/>
           </a:p>
         </p:txBody>
       </p:sp>
@@ -12513,6 +12602,7 @@
           <a:lstStyle/>
           <a:p>
             <a:pPr algn="ctr"/>
+            <a:endParaRPr/>
           </a:p>
         </p:txBody>
       </p:sp>
@@ -12559,7 +12649,7 @@
 </file>
 
 <file path=ppt/slides/slide17.xml><?xml version="1.0" encoding="utf-8"?>
-<p:sld xmlns:a="http://schemas.openxmlformats.org/drawingml/2006/main" xmlns:p="http://schemas.openxmlformats.org/presentationml/2006/main" xmlns:r="http://schemas.openxmlformats.org/officeDocument/2006/relationships">
+<p:sld xmlns:a="http://schemas.openxmlformats.org/drawingml/2006/main" xmlns:r="http://schemas.openxmlformats.org/officeDocument/2006/relationships" xmlns:p="http://schemas.openxmlformats.org/presentationml/2006/main">
   <p:cSld>
     <p:spTree>
       <p:nvGrpSpPr>
@@ -12567,7 +12657,14 @@
         <p:cNvGrpSpPr/>
         <p:nvPr/>
       </p:nvGrpSpPr>
-      <p:grpSpPr/>
+      <p:grpSpPr>
+        <a:xfrm>
+          <a:off x="0" y="0"/>
+          <a:ext cx="0" cy="0"/>
+          <a:chOff x="0" y="0"/>
+          <a:chExt cx="0" cy="0"/>
+        </a:xfrm>
+      </p:grpSpPr>
       <p:sp>
         <p:nvSpPr>
           <p:cNvPr id="2" name="Rectangle 1"/>
@@ -12608,6 +12705,7 @@
           <a:lstStyle/>
           <a:p>
             <a:pPr algn="ctr"/>
+            <a:endParaRPr/>
           </a:p>
         </p:txBody>
       </p:sp>
@@ -12651,6 +12749,7 @@
           <a:lstStyle/>
           <a:p>
             <a:pPr algn="ctr"/>
+            <a:endParaRPr/>
           </a:p>
         </p:txBody>
       </p:sp>
@@ -12800,7 +12899,7 @@
 </file>
 
 <file path=ppt/slides/slide18.xml><?xml version="1.0" encoding="utf-8"?>
-<p:sld xmlns:a="http://schemas.openxmlformats.org/drawingml/2006/main" xmlns:p="http://schemas.openxmlformats.org/presentationml/2006/main" xmlns:r="http://schemas.openxmlformats.org/officeDocument/2006/relationships">
+<p:sld xmlns:a="http://schemas.openxmlformats.org/drawingml/2006/main" xmlns:r="http://schemas.openxmlformats.org/officeDocument/2006/relationships" xmlns:p="http://schemas.openxmlformats.org/presentationml/2006/main">
   <p:cSld>
     <p:spTree>
       <p:nvGrpSpPr>
@@ -12808,7 +12907,14 @@
         <p:cNvGrpSpPr/>
         <p:nvPr/>
       </p:nvGrpSpPr>
-      <p:grpSpPr/>
+      <p:grpSpPr>
+        <a:xfrm>
+          <a:off x="0" y="0"/>
+          <a:ext cx="0" cy="0"/>
+          <a:chOff x="0" y="0"/>
+          <a:chExt cx="0" cy="0"/>
+        </a:xfrm>
+      </p:grpSpPr>
       <p:sp>
         <p:nvSpPr>
           <p:cNvPr id="2" name="Rectangle 1"/>
@@ -12849,6 +12955,7 @@
           <a:lstStyle/>
           <a:p>
             <a:pPr algn="ctr"/>
+            <a:endParaRPr/>
           </a:p>
         </p:txBody>
       </p:sp>
@@ -12892,6 +12999,7 @@
           <a:lstStyle/>
           <a:p>
             <a:pPr algn="ctr"/>
+            <a:endParaRPr/>
           </a:p>
         </p:txBody>
       </p:sp>
@@ -13003,6 +13111,7 @@
           <a:lstStyle/>
           <a:p>
             <a:pPr algn="ctr"/>
+            <a:endParaRPr/>
           </a:p>
         </p:txBody>
       </p:sp>
@@ -13114,6 +13223,7 @@
           <a:lstStyle/>
           <a:p>
             <a:pPr algn="ctr"/>
+            <a:endParaRPr/>
           </a:p>
         </p:txBody>
       </p:sp>
@@ -13191,6 +13301,7 @@
           <a:lstStyle/>
           <a:p>
             <a:pPr algn="ctr"/>
+            <a:endParaRPr/>
           </a:p>
         </p:txBody>
       </p:sp>
@@ -13234,6 +13345,7 @@
           <a:lstStyle/>
           <a:p>
             <a:pPr algn="ctr"/>
+            <a:endParaRPr/>
           </a:p>
         </p:txBody>
       </p:sp>
@@ -13345,6 +13457,7 @@
           <a:lstStyle/>
           <a:p>
             <a:pPr algn="ctr"/>
+            <a:endParaRPr/>
           </a:p>
         </p:txBody>
       </p:sp>
@@ -13388,6 +13501,7 @@
           <a:lstStyle/>
           <a:p>
             <a:pPr algn="ctr"/>
+            <a:endParaRPr/>
           </a:p>
         </p:txBody>
       </p:sp>
@@ -13499,6 +13613,7 @@
           <a:lstStyle/>
           <a:p>
             <a:pPr algn="ctr"/>
+            <a:endParaRPr/>
           </a:p>
         </p:txBody>
       </p:sp>
@@ -13542,6 +13657,7 @@
           <a:lstStyle/>
           <a:p>
             <a:pPr algn="ctr"/>
+            <a:endParaRPr/>
           </a:p>
         </p:txBody>
       </p:sp>
@@ -13653,6 +13769,7 @@
           <a:lstStyle/>
           <a:p>
             <a:pPr algn="ctr"/>
+            <a:endParaRPr/>
           </a:p>
         </p:txBody>
       </p:sp>
@@ -13696,6 +13813,7 @@
           <a:lstStyle/>
           <a:p>
             <a:pPr algn="ctr"/>
+            <a:endParaRPr/>
           </a:p>
         </p:txBody>
       </p:sp>
@@ -13807,6 +13925,7 @@
           <a:lstStyle/>
           <a:p>
             <a:pPr algn="ctr"/>
+            <a:endParaRPr/>
           </a:p>
         </p:txBody>
       </p:sp>
@@ -13884,6 +14003,7 @@
           <a:lstStyle/>
           <a:p>
             <a:pPr algn="ctr"/>
+            <a:endParaRPr/>
           </a:p>
         </p:txBody>
       </p:sp>
@@ -13961,6 +14081,7 @@
           <a:lstStyle/>
           <a:p>
             <a:pPr algn="ctr"/>
+            <a:endParaRPr/>
           </a:p>
         </p:txBody>
       </p:sp>
@@ -14039,6 +14160,7 @@
           <a:lstStyle/>
           <a:p>
             <a:pPr algn="ctr"/>
+            <a:endParaRPr/>
           </a:p>
         </p:txBody>
       </p:sp>
@@ -14116,6 +14238,7 @@
           <a:lstStyle/>
           <a:p>
             <a:pPr algn="ctr"/>
+            <a:endParaRPr/>
           </a:p>
         </p:txBody>
       </p:sp>
@@ -14194,6 +14317,7 @@
           <a:lstStyle/>
           <a:p>
             <a:pPr algn="ctr"/>
+            <a:endParaRPr/>
           </a:p>
         </p:txBody>
       </p:sp>
@@ -14271,6 +14395,7 @@
           <a:lstStyle/>
           <a:p>
             <a:pPr algn="ctr"/>
+            <a:endParaRPr/>
           </a:p>
         </p:txBody>
       </p:sp>
@@ -14382,6 +14507,7 @@
           <a:lstStyle/>
           <a:p>
             <a:pPr algn="ctr"/>
+            <a:endParaRPr/>
           </a:p>
         </p:txBody>
       </p:sp>
@@ -14493,6 +14619,7 @@
           <a:lstStyle/>
           <a:p>
             <a:pPr algn="ctr"/>
+            <a:endParaRPr/>
           </a:p>
         </p:txBody>
       </p:sp>
@@ -14604,6 +14731,7 @@
           <a:lstStyle/>
           <a:p>
             <a:pPr algn="ctr"/>
+            <a:endParaRPr/>
           </a:p>
         </p:txBody>
       </p:sp>
@@ -14715,6 +14843,7 @@
           <a:lstStyle/>
           <a:p>
             <a:pPr algn="ctr"/>
+            <a:endParaRPr/>
           </a:p>
         </p:txBody>
       </p:sp>
@@ -14826,6 +14955,7 @@
           <a:lstStyle/>
           <a:p>
             <a:pPr algn="ctr"/>
+            <a:endParaRPr/>
           </a:p>
         </p:txBody>
       </p:sp>
@@ -14903,6 +15033,7 @@
           <a:lstStyle/>
           <a:p>
             <a:pPr algn="ctr"/>
+            <a:endParaRPr/>
           </a:p>
         </p:txBody>
       </p:sp>
@@ -14946,6 +15077,7 @@
           <a:lstStyle/>
           <a:p>
             <a:pPr algn="ctr"/>
+            <a:endParaRPr/>
           </a:p>
         </p:txBody>
       </p:sp>
@@ -15091,6 +15223,7 @@
           <a:lstStyle/>
           <a:p>
             <a:pPr algn="ctr"/>
+            <a:endParaRPr/>
           </a:p>
         </p:txBody>
       </p:sp>
@@ -15134,6 +15267,7 @@
           <a:lstStyle/>
           <a:p>
             <a:pPr algn="ctr"/>
+            <a:endParaRPr/>
           </a:p>
         </p:txBody>
       </p:sp>
@@ -15279,6 +15413,7 @@
           <a:lstStyle/>
           <a:p>
             <a:pPr algn="ctr"/>
+            <a:endParaRPr/>
           </a:p>
         </p:txBody>
       </p:sp>
@@ -15322,6 +15457,7 @@
           <a:lstStyle/>
           <a:p>
             <a:pPr algn="ctr"/>
+            <a:endParaRPr/>
           </a:p>
         </p:txBody>
       </p:sp>
@@ -15436,7 +15572,7 @@
 </file>
 
 <file path=ppt/slides/slide19.xml><?xml version="1.0" encoding="utf-8"?>
-<p:sld xmlns:a="http://schemas.openxmlformats.org/drawingml/2006/main" xmlns:p="http://schemas.openxmlformats.org/presentationml/2006/main" xmlns:r="http://schemas.openxmlformats.org/officeDocument/2006/relationships">
+<p:sld xmlns:a="http://schemas.openxmlformats.org/drawingml/2006/main" xmlns:r="http://schemas.openxmlformats.org/officeDocument/2006/relationships" xmlns:p="http://schemas.openxmlformats.org/presentationml/2006/main">
   <p:cSld>
     <p:spTree>
       <p:nvGrpSpPr>
@@ -15444,7 +15580,14 @@
         <p:cNvGrpSpPr/>
         <p:nvPr/>
       </p:nvGrpSpPr>
-      <p:grpSpPr/>
+      <p:grpSpPr>
+        <a:xfrm>
+          <a:off x="0" y="0"/>
+          <a:ext cx="0" cy="0"/>
+          <a:chOff x="0" y="0"/>
+          <a:chExt cx="0" cy="0"/>
+        </a:xfrm>
+      </p:grpSpPr>
       <p:sp>
         <p:nvSpPr>
           <p:cNvPr id="2" name="Rectangle 1"/>
@@ -15485,6 +15628,7 @@
           <a:lstStyle/>
           <a:p>
             <a:pPr algn="ctr"/>
+            <a:endParaRPr/>
           </a:p>
         </p:txBody>
       </p:sp>
@@ -15528,6 +15672,7 @@
           <a:lstStyle/>
           <a:p>
             <a:pPr algn="ctr"/>
+            <a:endParaRPr/>
           </a:p>
         </p:txBody>
       </p:sp>
@@ -15639,6 +15784,7 @@
           <a:lstStyle/>
           <a:p>
             <a:pPr algn="ctr"/>
+            <a:endParaRPr/>
           </a:p>
         </p:txBody>
       </p:sp>
@@ -15750,6 +15896,7 @@
           <a:lstStyle/>
           <a:p>
             <a:pPr algn="ctr"/>
+            <a:endParaRPr/>
           </a:p>
         </p:txBody>
       </p:sp>
@@ -15891,6 +16038,7 @@
           <a:lstStyle/>
           <a:p>
             <a:pPr algn="ctr"/>
+            <a:endParaRPr/>
           </a:p>
         </p:txBody>
       </p:sp>
@@ -16032,6 +16180,7 @@
           <a:lstStyle/>
           <a:p>
             <a:pPr algn="ctr"/>
+            <a:endParaRPr/>
           </a:p>
         </p:txBody>
       </p:sp>
@@ -16173,6 +16322,7 @@
           <a:lstStyle/>
           <a:p>
             <a:pPr algn="ctr"/>
+            <a:endParaRPr/>
           </a:p>
         </p:txBody>
       </p:sp>
@@ -16314,6 +16464,7 @@
           <a:lstStyle/>
           <a:p>
             <a:pPr algn="ctr"/>
+            <a:endParaRPr/>
           </a:p>
         </p:txBody>
       </p:sp>
@@ -16455,6 +16606,7 @@
           <a:lstStyle/>
           <a:p>
             <a:pPr algn="ctr"/>
+            <a:endParaRPr/>
           </a:p>
         </p:txBody>
       </p:sp>
@@ -16596,6 +16748,7 @@
           <a:lstStyle/>
           <a:p>
             <a:pPr algn="ctr"/>
+            <a:endParaRPr/>
           </a:p>
         </p:txBody>
       </p:sp>
@@ -16737,6 +16890,7 @@
           <a:lstStyle/>
           <a:p>
             <a:pPr algn="ctr"/>
+            <a:endParaRPr/>
           </a:p>
         </p:txBody>
       </p:sp>
@@ -16878,6 +17032,7 @@
           <a:lstStyle/>
           <a:p>
             <a:pPr algn="ctr"/>
+            <a:endParaRPr/>
           </a:p>
         </p:txBody>
       </p:sp>
@@ -17019,6 +17174,7 @@
           <a:lstStyle/>
           <a:p>
             <a:pPr algn="ctr"/>
+            <a:endParaRPr/>
           </a:p>
         </p:txBody>
       </p:sp>
@@ -17160,6 +17316,7 @@
           <a:lstStyle/>
           <a:p>
             <a:pPr algn="ctr"/>
+            <a:endParaRPr/>
           </a:p>
         </p:txBody>
       </p:sp>
@@ -17301,6 +17458,7 @@
           <a:lstStyle/>
           <a:p>
             <a:pPr algn="ctr"/>
+            <a:endParaRPr/>
           </a:p>
         </p:txBody>
       </p:sp>
@@ -17442,6 +17600,7 @@
           <a:lstStyle/>
           <a:p>
             <a:pPr algn="ctr"/>
+            <a:endParaRPr/>
           </a:p>
         </p:txBody>
       </p:sp>
@@ -17583,6 +17742,7 @@
           <a:lstStyle/>
           <a:p>
             <a:pPr algn="ctr"/>
+            <a:endParaRPr/>
           </a:p>
         </p:txBody>
       </p:sp>
@@ -17724,6 +17884,7 @@
           <a:lstStyle/>
           <a:p>
             <a:pPr algn="ctr"/>
+            <a:endParaRPr/>
           </a:p>
         </p:txBody>
       </p:sp>
@@ -17865,6 +18026,7 @@
           <a:lstStyle/>
           <a:p>
             <a:pPr algn="ctr"/>
+            <a:endParaRPr/>
           </a:p>
         </p:txBody>
       </p:sp>
@@ -18006,6 +18168,7 @@
           <a:lstStyle/>
           <a:p>
             <a:pPr algn="ctr"/>
+            <a:endParaRPr/>
           </a:p>
         </p:txBody>
       </p:sp>
@@ -18147,6 +18310,7 @@
           <a:lstStyle/>
           <a:p>
             <a:pPr algn="ctr"/>
+            <a:endParaRPr/>
           </a:p>
         </p:txBody>
       </p:sp>
@@ -18288,6 +18452,7 @@
           <a:lstStyle/>
           <a:p>
             <a:pPr algn="ctr"/>
+            <a:endParaRPr/>
           </a:p>
         </p:txBody>
       </p:sp>
@@ -18429,6 +18594,7 @@
           <a:lstStyle/>
           <a:p>
             <a:pPr algn="ctr"/>
+            <a:endParaRPr/>
           </a:p>
         </p:txBody>
       </p:sp>
@@ -18539,7 +18705,7 @@
 </file>
 
 <file path=ppt/slides/slide2.xml><?xml version="1.0" encoding="utf-8"?>
-<p:sld xmlns:a="http://schemas.openxmlformats.org/drawingml/2006/main" xmlns:p="http://schemas.openxmlformats.org/presentationml/2006/main" xmlns:r="http://schemas.openxmlformats.org/officeDocument/2006/relationships">
+<p:sld xmlns:a="http://schemas.openxmlformats.org/drawingml/2006/main" xmlns:r="http://schemas.openxmlformats.org/officeDocument/2006/relationships" xmlns:p="http://schemas.openxmlformats.org/presentationml/2006/main">
   <p:cSld>
     <p:spTree>
       <p:nvGrpSpPr>
@@ -18547,7 +18713,14 @@
         <p:cNvGrpSpPr/>
         <p:nvPr/>
       </p:nvGrpSpPr>
-      <p:grpSpPr/>
+      <p:grpSpPr>
+        <a:xfrm>
+          <a:off x="0" y="0"/>
+          <a:ext cx="0" cy="0"/>
+          <a:chOff x="0" y="0"/>
+          <a:chExt cx="0" cy="0"/>
+        </a:xfrm>
+      </p:grpSpPr>
       <p:sp>
         <p:nvSpPr>
           <p:cNvPr id="2" name="Rectangle 1"/>
@@ -18588,6 +18761,7 @@
           <a:lstStyle/>
           <a:p>
             <a:pPr algn="ctr"/>
+            <a:endParaRPr/>
           </a:p>
         </p:txBody>
       </p:sp>
@@ -18631,6 +18805,7 @@
           <a:lstStyle/>
           <a:p>
             <a:pPr algn="ctr"/>
+            <a:endParaRPr/>
           </a:p>
         </p:txBody>
       </p:sp>
@@ -18708,6 +18883,7 @@
           <a:lstStyle/>
           <a:p>
             <a:pPr algn="ctr"/>
+            <a:endParaRPr/>
           </a:p>
         </p:txBody>
       </p:sp>
@@ -18819,6 +18995,7 @@
           <a:lstStyle/>
           <a:p>
             <a:pPr algn="ctr"/>
+            <a:endParaRPr/>
           </a:p>
         </p:txBody>
       </p:sp>
@@ -18862,6 +19039,7 @@
           <a:lstStyle/>
           <a:p>
             <a:pPr algn="ctr"/>
+            <a:endParaRPr/>
           </a:p>
         </p:txBody>
       </p:sp>
@@ -19007,6 +19185,7 @@
           <a:lstStyle/>
           <a:p>
             <a:pPr algn="ctr"/>
+            <a:endParaRPr/>
           </a:p>
         </p:txBody>
       </p:sp>
@@ -19050,6 +19229,7 @@
           <a:lstStyle/>
           <a:p>
             <a:pPr algn="ctr"/>
+            <a:endParaRPr/>
           </a:p>
         </p:txBody>
       </p:sp>
@@ -19195,6 +19375,7 @@
           <a:lstStyle/>
           <a:p>
             <a:pPr algn="ctr"/>
+            <a:endParaRPr/>
           </a:p>
         </p:txBody>
       </p:sp>
@@ -19238,6 +19419,7 @@
           <a:lstStyle/>
           <a:p>
             <a:pPr algn="ctr"/>
+            <a:endParaRPr/>
           </a:p>
         </p:txBody>
       </p:sp>
@@ -19383,6 +19565,7 @@
           <a:lstStyle/>
           <a:p>
             <a:pPr algn="ctr"/>
+            <a:endParaRPr/>
           </a:p>
         </p:txBody>
       </p:sp>
@@ -19426,6 +19609,7 @@
           <a:lstStyle/>
           <a:p>
             <a:pPr algn="ctr"/>
+            <a:endParaRPr/>
           </a:p>
         </p:txBody>
       </p:sp>
@@ -19571,6 +19755,7 @@
           <a:lstStyle/>
           <a:p>
             <a:pPr algn="ctr"/>
+            <a:endParaRPr/>
           </a:p>
         </p:txBody>
       </p:sp>
@@ -19614,6 +19799,7 @@
           <a:lstStyle/>
           <a:p>
             <a:pPr algn="ctr"/>
+            <a:endParaRPr/>
           </a:p>
         </p:txBody>
       </p:sp>
@@ -19759,6 +19945,7 @@
           <a:lstStyle/>
           <a:p>
             <a:pPr algn="ctr"/>
+            <a:endParaRPr/>
           </a:p>
         </p:txBody>
       </p:sp>
@@ -19802,6 +19989,7 @@
           <a:lstStyle/>
           <a:p>
             <a:pPr algn="ctr"/>
+            <a:endParaRPr/>
           </a:p>
         </p:txBody>
       </p:sp>
@@ -19947,6 +20135,7 @@
           <a:lstStyle/>
           <a:p>
             <a:pPr algn="ctr"/>
+            <a:endParaRPr/>
           </a:p>
         </p:txBody>
       </p:sp>
@@ -19990,6 +20179,7 @@
           <a:lstStyle/>
           <a:p>
             <a:pPr algn="ctr"/>
+            <a:endParaRPr/>
           </a:p>
         </p:txBody>
       </p:sp>
@@ -20135,6 +20325,7 @@
           <a:lstStyle/>
           <a:p>
             <a:pPr algn="ctr"/>
+            <a:endParaRPr/>
           </a:p>
         </p:txBody>
       </p:sp>
@@ -20178,6 +20369,7 @@
           <a:lstStyle/>
           <a:p>
             <a:pPr algn="ctr"/>
+            <a:endParaRPr/>
           </a:p>
         </p:txBody>
       </p:sp>
@@ -20323,6 +20515,7 @@
           <a:lstStyle/>
           <a:p>
             <a:pPr algn="ctr"/>
+            <a:endParaRPr/>
           </a:p>
         </p:txBody>
       </p:sp>
@@ -20366,6 +20559,7 @@
           <a:lstStyle/>
           <a:p>
             <a:pPr algn="ctr"/>
+            <a:endParaRPr/>
           </a:p>
         </p:txBody>
       </p:sp>
@@ -20511,6 +20705,7 @@
           <a:lstStyle/>
           <a:p>
             <a:pPr algn="ctr"/>
+            <a:endParaRPr/>
           </a:p>
         </p:txBody>
       </p:sp>
@@ -20554,6 +20749,7 @@
           <a:lstStyle/>
           <a:p>
             <a:pPr algn="ctr"/>
+            <a:endParaRPr/>
           </a:p>
         </p:txBody>
       </p:sp>
@@ -20699,6 +20895,7 @@
           <a:lstStyle/>
           <a:p>
             <a:pPr algn="ctr"/>
+            <a:endParaRPr/>
           </a:p>
         </p:txBody>
       </p:sp>
@@ -20742,6 +20939,7 @@
           <a:lstStyle/>
           <a:p>
             <a:pPr algn="ctr"/>
+            <a:endParaRPr/>
           </a:p>
         </p:txBody>
       </p:sp>
@@ -20887,6 +21085,7 @@
           <a:lstStyle/>
           <a:p>
             <a:pPr algn="ctr"/>
+            <a:endParaRPr/>
           </a:p>
         </p:txBody>
       </p:sp>
@@ -20930,6 +21129,7 @@
           <a:lstStyle/>
           <a:p>
             <a:pPr algn="ctr"/>
+            <a:endParaRPr/>
           </a:p>
         </p:txBody>
       </p:sp>
@@ -21075,6 +21275,7 @@
           <a:lstStyle/>
           <a:p>
             <a:pPr algn="ctr"/>
+            <a:endParaRPr/>
           </a:p>
         </p:txBody>
       </p:sp>
@@ -21118,6 +21319,7 @@
           <a:lstStyle/>
           <a:p>
             <a:pPr algn="ctr"/>
+            <a:endParaRPr/>
           </a:p>
         </p:txBody>
       </p:sp>
@@ -21263,6 +21465,7 @@
           <a:lstStyle/>
           <a:p>
             <a:pPr algn="ctr"/>
+            <a:endParaRPr/>
           </a:p>
         </p:txBody>
       </p:sp>
@@ -21306,6 +21509,7 @@
           <a:lstStyle/>
           <a:p>
             <a:pPr algn="ctr"/>
+            <a:endParaRPr/>
           </a:p>
         </p:txBody>
       </p:sp>
@@ -21386,7 +21590,7 @@
 </file>
 
 <file path=ppt/slides/slide20.xml><?xml version="1.0" encoding="utf-8"?>
-<p:sld xmlns:a="http://schemas.openxmlformats.org/drawingml/2006/main" xmlns:p="http://schemas.openxmlformats.org/presentationml/2006/main" xmlns:r="http://schemas.openxmlformats.org/officeDocument/2006/relationships">
+<p:sld xmlns:a="http://schemas.openxmlformats.org/drawingml/2006/main" xmlns:r="http://schemas.openxmlformats.org/officeDocument/2006/relationships" xmlns:p="http://schemas.openxmlformats.org/presentationml/2006/main">
   <p:cSld>
     <p:spTree>
       <p:nvGrpSpPr>
@@ -21394,7 +21598,14 @@
         <p:cNvGrpSpPr/>
         <p:nvPr/>
       </p:nvGrpSpPr>
-      <p:grpSpPr/>
+      <p:grpSpPr>
+        <a:xfrm>
+          <a:off x="0" y="0"/>
+          <a:ext cx="0" cy="0"/>
+          <a:chOff x="0" y="0"/>
+          <a:chExt cx="0" cy="0"/>
+        </a:xfrm>
+      </p:grpSpPr>
       <p:sp>
         <p:nvSpPr>
           <p:cNvPr id="2" name="Rectangle 1"/>
@@ -21435,6 +21646,7 @@
           <a:lstStyle/>
           <a:p>
             <a:pPr algn="ctr"/>
+            <a:endParaRPr/>
           </a:p>
         </p:txBody>
       </p:sp>
@@ -21478,6 +21690,7 @@
           <a:lstStyle/>
           <a:p>
             <a:pPr algn="ctr"/>
+            <a:endParaRPr/>
           </a:p>
         </p:txBody>
       </p:sp>
@@ -21589,6 +21802,7 @@
           <a:lstStyle/>
           <a:p>
             <a:pPr algn="ctr"/>
+            <a:endParaRPr/>
           </a:p>
         </p:txBody>
       </p:sp>
@@ -21700,6 +21914,7 @@
           <a:lstStyle/>
           <a:p>
             <a:pPr algn="ctr"/>
+            <a:endParaRPr/>
           </a:p>
         </p:txBody>
       </p:sp>
@@ -21743,6 +21958,7 @@
           <a:lstStyle/>
           <a:p>
             <a:pPr algn="ctr"/>
+            <a:endParaRPr/>
           </a:p>
         </p:txBody>
       </p:sp>
@@ -21786,6 +22002,7 @@
           <a:lstStyle/>
           <a:p>
             <a:pPr algn="ctr"/>
+            <a:endParaRPr/>
           </a:p>
         </p:txBody>
       </p:sp>
@@ -21931,6 +22148,7 @@
           <a:lstStyle/>
           <a:p>
             <a:pPr algn="ctr"/>
+            <a:endParaRPr/>
           </a:p>
         </p:txBody>
       </p:sp>
@@ -21974,6 +22192,7 @@
           <a:lstStyle/>
           <a:p>
             <a:pPr algn="ctr"/>
+            <a:endParaRPr/>
           </a:p>
         </p:txBody>
       </p:sp>
@@ -22017,6 +22236,7 @@
           <a:lstStyle/>
           <a:p>
             <a:pPr algn="ctr"/>
+            <a:endParaRPr/>
           </a:p>
         </p:txBody>
       </p:sp>
@@ -22162,6 +22382,7 @@
           <a:lstStyle/>
           <a:p>
             <a:pPr algn="ctr"/>
+            <a:endParaRPr/>
           </a:p>
         </p:txBody>
       </p:sp>
@@ -22205,6 +22426,7 @@
           <a:lstStyle/>
           <a:p>
             <a:pPr algn="ctr"/>
+            <a:endParaRPr/>
           </a:p>
         </p:txBody>
       </p:sp>
@@ -22248,6 +22470,7 @@
           <a:lstStyle/>
           <a:p>
             <a:pPr algn="ctr"/>
+            <a:endParaRPr/>
           </a:p>
         </p:txBody>
       </p:sp>
@@ -22393,6 +22616,7 @@
           <a:lstStyle/>
           <a:p>
             <a:pPr algn="ctr"/>
+            <a:endParaRPr/>
           </a:p>
         </p:txBody>
       </p:sp>
@@ -22436,6 +22660,7 @@
           <a:lstStyle/>
           <a:p>
             <a:pPr algn="ctr"/>
+            <a:endParaRPr/>
           </a:p>
         </p:txBody>
       </p:sp>
@@ -22479,6 +22704,7 @@
           <a:lstStyle/>
           <a:p>
             <a:pPr algn="ctr"/>
+            <a:endParaRPr/>
           </a:p>
         </p:txBody>
       </p:sp>
@@ -22624,6 +22850,7 @@
           <a:lstStyle/>
           <a:p>
             <a:pPr algn="ctr"/>
+            <a:endParaRPr/>
           </a:p>
         </p:txBody>
       </p:sp>
@@ -22667,6 +22894,7 @@
           <a:lstStyle/>
           <a:p>
             <a:pPr algn="ctr"/>
+            <a:endParaRPr/>
           </a:p>
         </p:txBody>
       </p:sp>
@@ -22710,6 +22938,7 @@
           <a:lstStyle/>
           <a:p>
             <a:pPr algn="ctr"/>
+            <a:endParaRPr/>
           </a:p>
         </p:txBody>
       </p:sp>
@@ -22855,6 +23084,7 @@
           <a:lstStyle/>
           <a:p>
             <a:pPr algn="ctr"/>
+            <a:endParaRPr/>
           </a:p>
         </p:txBody>
       </p:sp>
@@ -22898,6 +23128,7 @@
           <a:lstStyle/>
           <a:p>
             <a:pPr algn="ctr"/>
+            <a:endParaRPr/>
           </a:p>
         </p:txBody>
       </p:sp>
@@ -22941,6 +23172,7 @@
           <a:lstStyle/>
           <a:p>
             <a:pPr algn="ctr"/>
+            <a:endParaRPr/>
           </a:p>
         </p:txBody>
       </p:sp>
@@ -23055,7 +23287,7 @@
 </file>
 
 <file path=ppt/slides/slide21.xml><?xml version="1.0" encoding="utf-8"?>
-<p:sld xmlns:a="http://schemas.openxmlformats.org/drawingml/2006/main" xmlns:p="http://schemas.openxmlformats.org/presentationml/2006/main" xmlns:r="http://schemas.openxmlformats.org/officeDocument/2006/relationships">
+<p:sld xmlns:a="http://schemas.openxmlformats.org/drawingml/2006/main" xmlns:r="http://schemas.openxmlformats.org/officeDocument/2006/relationships" xmlns:p="http://schemas.openxmlformats.org/presentationml/2006/main">
   <p:cSld>
     <p:spTree>
       <p:nvGrpSpPr>
@@ -23063,7 +23295,14 @@
         <p:cNvGrpSpPr/>
         <p:nvPr/>
       </p:nvGrpSpPr>
-      <p:grpSpPr/>
+      <p:grpSpPr>
+        <a:xfrm>
+          <a:off x="0" y="0"/>
+          <a:ext cx="0" cy="0"/>
+          <a:chOff x="0" y="0"/>
+          <a:chExt cx="0" cy="0"/>
+        </a:xfrm>
+      </p:grpSpPr>
       <p:sp>
         <p:nvSpPr>
           <p:cNvPr id="2" name="Rectangle 1"/>
@@ -23104,6 +23343,7 @@
           <a:lstStyle/>
           <a:p>
             <a:pPr algn="ctr"/>
+            <a:endParaRPr/>
           </a:p>
         </p:txBody>
       </p:sp>
@@ -23147,6 +23387,7 @@
           <a:lstStyle/>
           <a:p>
             <a:pPr algn="ctr"/>
+            <a:endParaRPr/>
           </a:p>
         </p:txBody>
       </p:sp>
@@ -23258,6 +23499,7 @@
           <a:lstStyle/>
           <a:p>
             <a:pPr algn="ctr"/>
+            <a:endParaRPr/>
           </a:p>
         </p:txBody>
       </p:sp>
@@ -23369,6 +23611,7 @@
           <a:lstStyle/>
           <a:p>
             <a:pPr algn="ctr"/>
+            <a:endParaRPr/>
           </a:p>
         </p:txBody>
       </p:sp>
@@ -23480,6 +23723,7 @@
           <a:lstStyle/>
           <a:p>
             <a:pPr algn="ctr"/>
+            <a:endParaRPr/>
           </a:p>
         </p:txBody>
       </p:sp>
@@ -23591,6 +23835,7 @@
           <a:lstStyle/>
           <a:p>
             <a:pPr algn="ctr"/>
+            <a:endParaRPr/>
           </a:p>
         </p:txBody>
       </p:sp>
@@ -23702,6 +23947,7 @@
           <a:lstStyle/>
           <a:p>
             <a:pPr algn="ctr"/>
+            <a:endParaRPr/>
           </a:p>
         </p:txBody>
       </p:sp>
@@ -23813,6 +24059,7 @@
           <a:lstStyle/>
           <a:p>
             <a:pPr algn="ctr"/>
+            <a:endParaRPr/>
           </a:p>
         </p:txBody>
       </p:sp>
@@ -23924,6 +24171,7 @@
           <a:lstStyle/>
           <a:p>
             <a:pPr algn="ctr"/>
+            <a:endParaRPr/>
           </a:p>
         </p:txBody>
       </p:sp>
@@ -24035,6 +24283,7 @@
           <a:lstStyle/>
           <a:p>
             <a:pPr algn="ctr"/>
+            <a:endParaRPr/>
           </a:p>
         </p:txBody>
       </p:sp>
@@ -24146,6 +24395,7 @@
           <a:lstStyle/>
           <a:p>
             <a:pPr algn="ctr"/>
+            <a:endParaRPr/>
           </a:p>
         </p:txBody>
       </p:sp>
@@ -24257,6 +24507,7 @@
           <a:lstStyle/>
           <a:p>
             <a:pPr algn="ctr"/>
+            <a:endParaRPr/>
           </a:p>
         </p:txBody>
       </p:sp>
@@ -24368,6 +24619,7 @@
           <a:lstStyle/>
           <a:p>
             <a:pPr algn="ctr"/>
+            <a:endParaRPr/>
           </a:p>
         </p:txBody>
       </p:sp>
@@ -24479,6 +24731,7 @@
           <a:lstStyle/>
           <a:p>
             <a:pPr algn="ctr"/>
+            <a:endParaRPr/>
           </a:p>
         </p:txBody>
       </p:sp>
@@ -24590,6 +24843,7 @@
           <a:lstStyle/>
           <a:p>
             <a:pPr algn="ctr"/>
+            <a:endParaRPr/>
           </a:p>
         </p:txBody>
       </p:sp>
@@ -24701,6 +24955,7 @@
           <a:lstStyle/>
           <a:p>
             <a:pPr algn="ctr"/>
+            <a:endParaRPr/>
           </a:p>
         </p:txBody>
       </p:sp>
@@ -24812,6 +25067,7 @@
           <a:lstStyle/>
           <a:p>
             <a:pPr algn="ctr"/>
+            <a:endParaRPr/>
           </a:p>
         </p:txBody>
       </p:sp>
@@ -24923,6 +25179,7 @@
           <a:lstStyle/>
           <a:p>
             <a:pPr algn="ctr"/>
+            <a:endParaRPr/>
           </a:p>
         </p:txBody>
       </p:sp>
@@ -25034,6 +25291,7 @@
           <a:lstStyle/>
           <a:p>
             <a:pPr algn="ctr"/>
+            <a:endParaRPr/>
           </a:p>
         </p:txBody>
       </p:sp>
@@ -25145,6 +25403,7 @@
           <a:lstStyle/>
           <a:p>
             <a:pPr algn="ctr"/>
+            <a:endParaRPr/>
           </a:p>
         </p:txBody>
       </p:sp>
@@ -25256,6 +25515,7 @@
           <a:lstStyle/>
           <a:p>
             <a:pPr algn="ctr"/>
+            <a:endParaRPr/>
           </a:p>
         </p:txBody>
       </p:sp>
@@ -25367,6 +25627,7 @@
           <a:lstStyle/>
           <a:p>
             <a:pPr algn="ctr"/>
+            <a:endParaRPr/>
           </a:p>
         </p:txBody>
       </p:sp>
@@ -25447,7 +25708,7 @@
 </file>
 
 <file path=ppt/slides/slide22.xml><?xml version="1.0" encoding="utf-8"?>
-<p:sld xmlns:a="http://schemas.openxmlformats.org/drawingml/2006/main" xmlns:p="http://schemas.openxmlformats.org/presentationml/2006/main" xmlns:r="http://schemas.openxmlformats.org/officeDocument/2006/relationships">
+<p:sld xmlns:a="http://schemas.openxmlformats.org/drawingml/2006/main" xmlns:r="http://schemas.openxmlformats.org/officeDocument/2006/relationships" xmlns:p="http://schemas.openxmlformats.org/presentationml/2006/main">
   <p:cSld>
     <p:spTree>
       <p:nvGrpSpPr>
@@ -25455,7 +25716,14 @@
         <p:cNvGrpSpPr/>
         <p:nvPr/>
       </p:nvGrpSpPr>
-      <p:grpSpPr/>
+      <p:grpSpPr>
+        <a:xfrm>
+          <a:off x="0" y="0"/>
+          <a:ext cx="0" cy="0"/>
+          <a:chOff x="0" y="0"/>
+          <a:chExt cx="0" cy="0"/>
+        </a:xfrm>
+      </p:grpSpPr>
       <p:sp>
         <p:nvSpPr>
           <p:cNvPr id="2" name="Rectangle 1"/>
@@ -25496,6 +25764,7 @@
           <a:lstStyle/>
           <a:p>
             <a:pPr algn="ctr"/>
+            <a:endParaRPr/>
           </a:p>
         </p:txBody>
       </p:sp>
@@ -25539,6 +25808,7 @@
           <a:lstStyle/>
           <a:p>
             <a:pPr algn="ctr"/>
+            <a:endParaRPr/>
           </a:p>
         </p:txBody>
       </p:sp>
@@ -25616,6 +25886,7 @@
           <a:lstStyle/>
           <a:p>
             <a:pPr algn="ctr"/>
+            <a:endParaRPr/>
           </a:p>
         </p:txBody>
       </p:sp>
@@ -25727,6 +25998,7 @@
           <a:lstStyle/>
           <a:p>
             <a:pPr algn="ctr"/>
+            <a:endParaRPr/>
           </a:p>
         </p:txBody>
       </p:sp>
@@ -25804,6 +26076,7 @@
           <a:lstStyle/>
           <a:p>
             <a:pPr algn="ctr"/>
+            <a:endParaRPr/>
           </a:p>
         </p:txBody>
       </p:sp>
@@ -25881,6 +26154,7 @@
           <a:lstStyle/>
           <a:p>
             <a:pPr algn="ctr"/>
+            <a:endParaRPr/>
           </a:p>
         </p:txBody>
       </p:sp>
@@ -25958,6 +26232,7 @@
           <a:lstStyle/>
           <a:p>
             <a:pPr algn="ctr"/>
+            <a:endParaRPr/>
           </a:p>
         </p:txBody>
       </p:sp>
@@ -26035,6 +26310,7 @@
           <a:lstStyle/>
           <a:p>
             <a:pPr algn="ctr"/>
+            <a:endParaRPr/>
           </a:p>
         </p:txBody>
       </p:sp>
@@ -26112,6 +26388,7 @@
           <a:lstStyle/>
           <a:p>
             <a:pPr algn="ctr"/>
+            <a:endParaRPr/>
           </a:p>
         </p:txBody>
       </p:sp>
@@ -26189,6 +26466,7 @@
           <a:lstStyle/>
           <a:p>
             <a:pPr algn="ctr"/>
+            <a:endParaRPr/>
           </a:p>
         </p:txBody>
       </p:sp>
@@ -26267,6 +26545,7 @@
           <a:lstStyle/>
           <a:p>
             <a:pPr algn="ctr"/>
+            <a:endParaRPr/>
           </a:p>
         </p:txBody>
       </p:sp>
@@ -26345,6 +26624,7 @@
           <a:lstStyle/>
           <a:p>
             <a:pPr algn="ctr"/>
+            <a:endParaRPr/>
           </a:p>
         </p:txBody>
       </p:sp>
@@ -26423,6 +26703,7 @@
           <a:lstStyle/>
           <a:p>
             <a:pPr algn="ctr"/>
+            <a:endParaRPr/>
           </a:p>
         </p:txBody>
       </p:sp>
@@ -26501,6 +26782,7 @@
           <a:lstStyle/>
           <a:p>
             <a:pPr algn="ctr"/>
+            <a:endParaRPr/>
           </a:p>
         </p:txBody>
       </p:sp>
@@ -26578,6 +26860,7 @@
           <a:lstStyle/>
           <a:p>
             <a:pPr algn="ctr"/>
+            <a:endParaRPr/>
           </a:p>
         </p:txBody>
       </p:sp>
@@ -26690,6 +26973,7 @@
           <a:lstStyle/>
           <a:p>
             <a:pPr algn="ctr"/>
+            <a:endParaRPr/>
           </a:p>
         </p:txBody>
       </p:sp>
@@ -26802,6 +27086,7 @@
           <a:lstStyle/>
           <a:p>
             <a:pPr algn="ctr"/>
+            <a:endParaRPr/>
           </a:p>
         </p:txBody>
       </p:sp>
@@ -26914,6 +27199,7 @@
           <a:lstStyle/>
           <a:p>
             <a:pPr algn="ctr"/>
+            <a:endParaRPr/>
           </a:p>
         </p:txBody>
       </p:sp>
@@ -26995,7 +27281,7 @@
 </file>
 
 <file path=ppt/slides/slide23.xml><?xml version="1.0" encoding="utf-8"?>
-<p:sld xmlns:a="http://schemas.openxmlformats.org/drawingml/2006/main" xmlns:p="http://schemas.openxmlformats.org/presentationml/2006/main" xmlns:r="http://schemas.openxmlformats.org/officeDocument/2006/relationships">
+<p:sld xmlns:a="http://schemas.openxmlformats.org/drawingml/2006/main" xmlns:r="http://schemas.openxmlformats.org/officeDocument/2006/relationships" xmlns:p="http://schemas.openxmlformats.org/presentationml/2006/main">
   <p:cSld>
     <p:spTree>
       <p:nvGrpSpPr>
@@ -27003,7 +27289,14 @@
         <p:cNvGrpSpPr/>
         <p:nvPr/>
       </p:nvGrpSpPr>
-      <p:grpSpPr/>
+      <p:grpSpPr>
+        <a:xfrm>
+          <a:off x="0" y="0"/>
+          <a:ext cx="0" cy="0"/>
+          <a:chOff x="0" y="0"/>
+          <a:chExt cx="0" cy="0"/>
+        </a:xfrm>
+      </p:grpSpPr>
       <p:sp>
         <p:nvSpPr>
           <p:cNvPr id="2" name="Rectangle 1"/>
@@ -27044,6 +27337,7 @@
           <a:lstStyle/>
           <a:p>
             <a:pPr algn="ctr"/>
+            <a:endParaRPr/>
           </a:p>
         </p:txBody>
       </p:sp>
@@ -27087,6 +27381,7 @@
           <a:lstStyle/>
           <a:p>
             <a:pPr algn="ctr"/>
+            <a:endParaRPr/>
           </a:p>
         </p:txBody>
       </p:sp>
@@ -27130,6 +27425,7 @@
           <a:lstStyle/>
           <a:p>
             <a:pPr algn="ctr"/>
+            <a:endParaRPr/>
           </a:p>
         </p:txBody>
       </p:sp>
@@ -27173,6 +27469,7 @@
           <a:lstStyle/>
           <a:p>
             <a:pPr algn="ctr"/>
+            <a:endParaRPr/>
           </a:p>
         </p:txBody>
       </p:sp>
@@ -27284,6 +27581,7 @@
           <a:lstStyle/>
           <a:p>
             <a:pPr algn="ctr"/>
+            <a:endParaRPr/>
           </a:p>
         </p:txBody>
       </p:sp>
@@ -27327,6 +27625,7 @@
           <a:lstStyle/>
           <a:p>
             <a:pPr algn="ctr"/>
+            <a:endParaRPr/>
           </a:p>
         </p:txBody>
       </p:sp>
@@ -27438,6 +27737,7 @@
           <a:lstStyle/>
           <a:p>
             <a:pPr algn="ctr"/>
+            <a:endParaRPr/>
           </a:p>
         </p:txBody>
       </p:sp>
@@ -27549,6 +27849,7 @@
           <a:lstStyle/>
           <a:p>
             <a:pPr algn="ctr"/>
+            <a:endParaRPr/>
           </a:p>
         </p:txBody>
       </p:sp>
@@ -27660,6 +27961,7 @@
           <a:lstStyle/>
           <a:p>
             <a:pPr algn="ctr"/>
+            <a:endParaRPr/>
           </a:p>
         </p:txBody>
       </p:sp>
@@ -27771,6 +28073,7 @@
           <a:lstStyle/>
           <a:p>
             <a:pPr algn="ctr"/>
+            <a:endParaRPr/>
           </a:p>
         </p:txBody>
       </p:sp>
@@ -27885,7 +28188,7 @@
 </file>
 
 <file path=ppt/slides/slide3.xml><?xml version="1.0" encoding="utf-8"?>
-<p:sld xmlns:a="http://schemas.openxmlformats.org/drawingml/2006/main" xmlns:p="http://schemas.openxmlformats.org/presentationml/2006/main" xmlns:r="http://schemas.openxmlformats.org/officeDocument/2006/relationships">
+<p:sld xmlns:a="http://schemas.openxmlformats.org/drawingml/2006/main" xmlns:r="http://schemas.openxmlformats.org/officeDocument/2006/relationships" xmlns:p="http://schemas.openxmlformats.org/presentationml/2006/main">
   <p:cSld>
     <p:spTree>
       <p:nvGrpSpPr>
@@ -27893,7 +28196,14 @@
         <p:cNvGrpSpPr/>
         <p:nvPr/>
       </p:nvGrpSpPr>
-      <p:grpSpPr/>
+      <p:grpSpPr>
+        <a:xfrm>
+          <a:off x="0" y="0"/>
+          <a:ext cx="0" cy="0"/>
+          <a:chOff x="0" y="0"/>
+          <a:chExt cx="0" cy="0"/>
+        </a:xfrm>
+      </p:grpSpPr>
       <p:sp>
         <p:nvSpPr>
           <p:cNvPr id="2" name="Rectangle 1"/>
@@ -27934,6 +28244,7 @@
           <a:lstStyle/>
           <a:p>
             <a:pPr algn="ctr"/>
+            <a:endParaRPr/>
           </a:p>
         </p:txBody>
       </p:sp>
@@ -27977,6 +28288,7 @@
           <a:lstStyle/>
           <a:p>
             <a:pPr algn="ctr"/>
+            <a:endParaRPr/>
           </a:p>
         </p:txBody>
       </p:sp>
@@ -28088,6 +28400,7 @@
           <a:lstStyle/>
           <a:p>
             <a:pPr algn="ctr"/>
+            <a:endParaRPr/>
           </a:p>
         </p:txBody>
       </p:sp>
@@ -28199,6 +28512,7 @@
           <a:lstStyle/>
           <a:p>
             <a:pPr algn="ctr"/>
+            <a:endParaRPr/>
           </a:p>
         </p:txBody>
       </p:sp>
@@ -28310,6 +28624,7 @@
           <a:lstStyle/>
           <a:p>
             <a:pPr algn="ctr"/>
+            <a:endParaRPr/>
           </a:p>
         </p:txBody>
       </p:sp>
@@ -28353,6 +28668,7 @@
           <a:lstStyle/>
           <a:p>
             <a:pPr algn="ctr"/>
+            <a:endParaRPr/>
           </a:p>
         </p:txBody>
       </p:sp>
@@ -28465,6 +28781,7 @@
           <a:lstStyle/>
           <a:p>
             <a:pPr algn="ctr"/>
+            <a:endParaRPr/>
           </a:p>
         </p:txBody>
       </p:sp>
@@ -28508,6 +28825,7 @@
           <a:lstStyle/>
           <a:p>
             <a:pPr algn="ctr"/>
+            <a:endParaRPr/>
           </a:p>
         </p:txBody>
       </p:sp>
@@ -28620,6 +28938,7 @@
           <a:lstStyle/>
           <a:p>
             <a:pPr algn="ctr"/>
+            <a:endParaRPr/>
           </a:p>
         </p:txBody>
       </p:sp>
@@ -28663,6 +28982,7 @@
           <a:lstStyle/>
           <a:p>
             <a:pPr algn="ctr"/>
+            <a:endParaRPr/>
           </a:p>
         </p:txBody>
       </p:sp>
@@ -28775,6 +29095,7 @@
           <a:lstStyle/>
           <a:p>
             <a:pPr algn="ctr"/>
+            <a:endParaRPr/>
           </a:p>
         </p:txBody>
       </p:sp>
@@ -28818,6 +29139,7 @@
           <a:lstStyle/>
           <a:p>
             <a:pPr algn="ctr"/>
+            <a:endParaRPr/>
           </a:p>
         </p:txBody>
       </p:sp>
@@ -28930,6 +29252,7 @@
           <a:lstStyle/>
           <a:p>
             <a:pPr algn="ctr"/>
+            <a:endParaRPr/>
           </a:p>
         </p:txBody>
       </p:sp>
@@ -28973,6 +29296,7 @@
           <a:lstStyle/>
           <a:p>
             <a:pPr algn="ctr"/>
+            <a:endParaRPr/>
           </a:p>
         </p:txBody>
       </p:sp>
@@ -29085,6 +29409,7 @@
           <a:lstStyle/>
           <a:p>
             <a:pPr algn="ctr"/>
+            <a:endParaRPr/>
           </a:p>
         </p:txBody>
       </p:sp>
@@ -29162,6 +29487,7 @@
           <a:lstStyle/>
           <a:p>
             <a:pPr algn="ctr"/>
+            <a:endParaRPr/>
           </a:p>
         </p:txBody>
       </p:sp>
@@ -29273,6 +29599,7 @@
           <a:lstStyle/>
           <a:p>
             <a:pPr algn="ctr"/>
+            <a:endParaRPr/>
           </a:p>
         </p:txBody>
       </p:sp>
@@ -29384,6 +29711,7 @@
           <a:lstStyle/>
           <a:p>
             <a:pPr algn="ctr"/>
+            <a:endParaRPr/>
           </a:p>
         </p:txBody>
       </p:sp>
@@ -29495,6 +29823,7 @@
           <a:lstStyle/>
           <a:p>
             <a:pPr algn="ctr"/>
+            <a:endParaRPr/>
           </a:p>
         </p:txBody>
       </p:sp>
@@ -29606,6 +29935,7 @@
           <a:lstStyle/>
           <a:p>
             <a:pPr algn="ctr"/>
+            <a:endParaRPr/>
           </a:p>
         </p:txBody>
       </p:sp>
@@ -29686,7 +30016,7 @@
 </file>
 
 <file path=ppt/slides/slide4.xml><?xml version="1.0" encoding="utf-8"?>
-<p:sld xmlns:a="http://schemas.openxmlformats.org/drawingml/2006/main" xmlns:p="http://schemas.openxmlformats.org/presentationml/2006/main" xmlns:r="http://schemas.openxmlformats.org/officeDocument/2006/relationships">
+<p:sld xmlns:a="http://schemas.openxmlformats.org/drawingml/2006/main" xmlns:r="http://schemas.openxmlformats.org/officeDocument/2006/relationships" xmlns:p="http://schemas.openxmlformats.org/presentationml/2006/main">
   <p:cSld>
     <p:spTree>
       <p:nvGrpSpPr>
@@ -29694,7 +30024,14 @@
         <p:cNvGrpSpPr/>
         <p:nvPr/>
       </p:nvGrpSpPr>
-      <p:grpSpPr/>
+      <p:grpSpPr>
+        <a:xfrm>
+          <a:off x="0" y="0"/>
+          <a:ext cx="0" cy="0"/>
+          <a:chOff x="0" y="0"/>
+          <a:chExt cx="0" cy="0"/>
+        </a:xfrm>
+      </p:grpSpPr>
       <p:sp>
         <p:nvSpPr>
           <p:cNvPr id="2" name="Rectangle 1"/>
@@ -29735,6 +30072,7 @@
           <a:lstStyle/>
           <a:p>
             <a:pPr algn="ctr"/>
+            <a:endParaRPr/>
           </a:p>
         </p:txBody>
       </p:sp>
@@ -29778,6 +30116,7 @@
           <a:lstStyle/>
           <a:p>
             <a:pPr algn="ctr"/>
+            <a:endParaRPr/>
           </a:p>
         </p:txBody>
       </p:sp>
@@ -29889,6 +30228,7 @@
           <a:lstStyle/>
           <a:p>
             <a:pPr algn="ctr"/>
+            <a:endParaRPr/>
           </a:p>
         </p:txBody>
       </p:sp>
@@ -30000,6 +30340,7 @@
           <a:lstStyle/>
           <a:p>
             <a:pPr algn="ctr"/>
+            <a:endParaRPr/>
           </a:p>
         </p:txBody>
       </p:sp>
@@ -30043,6 +30384,7 @@
           <a:lstStyle/>
           <a:p>
             <a:pPr algn="ctr"/>
+            <a:endParaRPr/>
           </a:p>
         </p:txBody>
       </p:sp>
@@ -30086,6 +30428,7 @@
           <a:lstStyle/>
           <a:p>
             <a:pPr algn="ctr"/>
+            <a:endParaRPr/>
           </a:p>
         </p:txBody>
       </p:sp>
@@ -30198,6 +30541,7 @@
           <a:lstStyle/>
           <a:p>
             <a:pPr algn="ctr"/>
+            <a:endParaRPr/>
           </a:p>
         </p:txBody>
       </p:sp>
@@ -30241,6 +30585,7 @@
           <a:lstStyle/>
           <a:p>
             <a:pPr algn="ctr"/>
+            <a:endParaRPr/>
           </a:p>
         </p:txBody>
       </p:sp>
@@ -30284,6 +30629,7 @@
           <a:lstStyle/>
           <a:p>
             <a:pPr algn="ctr"/>
+            <a:endParaRPr/>
           </a:p>
         </p:txBody>
       </p:sp>
@@ -30396,6 +30742,7 @@
           <a:lstStyle/>
           <a:p>
             <a:pPr algn="ctr"/>
+            <a:endParaRPr/>
           </a:p>
         </p:txBody>
       </p:sp>
@@ -30439,6 +30786,7 @@
           <a:lstStyle/>
           <a:p>
             <a:pPr algn="ctr"/>
+            <a:endParaRPr/>
           </a:p>
         </p:txBody>
       </p:sp>
@@ -30482,6 +30830,7 @@
           <a:lstStyle/>
           <a:p>
             <a:pPr algn="ctr"/>
+            <a:endParaRPr/>
           </a:p>
         </p:txBody>
       </p:sp>
@@ -30594,6 +30943,7 @@
           <a:lstStyle/>
           <a:p>
             <a:pPr algn="ctr"/>
+            <a:endParaRPr/>
           </a:p>
         </p:txBody>
       </p:sp>
@@ -30637,6 +30987,7 @@
           <a:lstStyle/>
           <a:p>
             <a:pPr algn="ctr"/>
+            <a:endParaRPr/>
           </a:p>
         </p:txBody>
       </p:sp>
@@ -30680,6 +31031,7 @@
           <a:lstStyle/>
           <a:p>
             <a:pPr algn="ctr"/>
+            <a:endParaRPr/>
           </a:p>
         </p:txBody>
       </p:sp>
@@ -30792,6 +31144,7 @@
           <a:lstStyle/>
           <a:p>
             <a:pPr algn="ctr"/>
+            <a:endParaRPr/>
           </a:p>
         </p:txBody>
       </p:sp>
@@ -30838,28 +31191,396 @@
         <p:spPr>
           <a:xfrm>
             <a:off x="365760" y="5074920"/>
-            <a:ext cx="11457432" cy="1280160"/>
-          </a:xfrm>
-          <a:prstGeom prst="rect">
-            <a:avLst/>
-          </a:prstGeom>
-          <a:noFill/>
-        </p:spPr>
-        <p:txBody>
-          <a:bodyPr wrap="square">
-            <a:spAutoFit/>
-          </a:bodyPr>
-          <a:lstStyle/>
-          <a:p>
-            <a:pPr algn="l"/>
-            <a:r>
-              <a:rPr sz="1050" b="0" i="0">
+            <a:ext cx="11457432" cy="738664"/>
+          </a:xfrm>
+          <a:prstGeom prst="rect">
+            <a:avLst/>
+          </a:prstGeom>
+          <a:noFill/>
+        </p:spPr>
+        <p:txBody>
+          <a:bodyPr wrap="square">
+            <a:spAutoFit/>
+          </a:bodyPr>
+          <a:lstStyle/>
+          <a:p>
+            <a:pPr algn="l"/>
+            <a:endParaRPr lang="en-US" sz="1050" b="0" i="0" dirty="0">
+              <a:solidFill>
+                <a:srgbClr val="444444"/>
+              </a:solidFill>
+            </a:endParaRPr>
+          </a:p>
+          <a:p>
+            <a:pPr algn="l"/>
+            <a:endParaRPr lang="en-US" sz="1050" dirty="0">
+              <a:solidFill>
+                <a:srgbClr val="444444"/>
+              </a:solidFill>
+            </a:endParaRPr>
+          </a:p>
+          <a:p>
+            <a:pPr algn="l"/>
+            <a:r>
+              <a:rPr sz="1050" b="0" i="0" dirty="0">
                 <a:solidFill>
                   <a:srgbClr val="444444"/>
                 </a:solidFill>
               </a:rPr>
-              <a:t>SNS 데이터는 너무 방대하고 빠르게 생성되어 사람이 24시간 수동으로 모니터링하는 것은 불가능합니다.
-또한 봇 공격인지 실제 소비자 불만인지 구분하지 못하면 불필요한 법적 대응으로 비용이 낭비됩니다.</a:t>
+              <a:t>SNS </a:t>
+            </a:r>
+            <a:r>
+              <a:rPr sz="1050" b="0" i="0" dirty="0" err="1">
+                <a:solidFill>
+                  <a:srgbClr val="444444"/>
+                </a:solidFill>
+              </a:rPr>
+              <a:t>데이터는</a:t>
+            </a:r>
+            <a:r>
+              <a:rPr sz="1050" b="0" i="0" dirty="0">
+                <a:solidFill>
+                  <a:srgbClr val="444444"/>
+                </a:solidFill>
+              </a:rPr>
+              <a:t> </a:t>
+            </a:r>
+            <a:r>
+              <a:rPr sz="1050" b="0" i="0" dirty="0" err="1">
+                <a:solidFill>
+                  <a:srgbClr val="444444"/>
+                </a:solidFill>
+              </a:rPr>
+              <a:t>너무</a:t>
+            </a:r>
+            <a:r>
+              <a:rPr sz="1050" b="0" i="0" dirty="0">
+                <a:solidFill>
+                  <a:srgbClr val="444444"/>
+                </a:solidFill>
+              </a:rPr>
+              <a:t> </a:t>
+            </a:r>
+            <a:r>
+              <a:rPr sz="1050" b="0" i="0" dirty="0" err="1">
+                <a:solidFill>
+                  <a:srgbClr val="444444"/>
+                </a:solidFill>
+              </a:rPr>
+              <a:t>방대하고</a:t>
+            </a:r>
+            <a:r>
+              <a:rPr sz="1050" b="0" i="0" dirty="0">
+                <a:solidFill>
+                  <a:srgbClr val="444444"/>
+                </a:solidFill>
+              </a:rPr>
+              <a:t> </a:t>
+            </a:r>
+            <a:r>
+              <a:rPr sz="1050" b="0" i="0" dirty="0" err="1">
+                <a:solidFill>
+                  <a:srgbClr val="444444"/>
+                </a:solidFill>
+              </a:rPr>
+              <a:t>빠르게</a:t>
+            </a:r>
+            <a:r>
+              <a:rPr sz="1050" b="0" i="0" dirty="0">
+                <a:solidFill>
+                  <a:srgbClr val="444444"/>
+                </a:solidFill>
+              </a:rPr>
+              <a:t> </a:t>
+            </a:r>
+            <a:r>
+              <a:rPr sz="1050" b="0" i="0" dirty="0" err="1">
+                <a:solidFill>
+                  <a:srgbClr val="444444"/>
+                </a:solidFill>
+              </a:rPr>
+              <a:t>생성되어</a:t>
+            </a:r>
+            <a:r>
+              <a:rPr sz="1050" b="0" i="0" dirty="0">
+                <a:solidFill>
+                  <a:srgbClr val="444444"/>
+                </a:solidFill>
+              </a:rPr>
+              <a:t> </a:t>
+            </a:r>
+            <a:r>
+              <a:rPr sz="1050" b="0" i="0" dirty="0" err="1">
+                <a:solidFill>
+                  <a:srgbClr val="444444"/>
+                </a:solidFill>
+              </a:rPr>
+              <a:t>사람이</a:t>
+            </a:r>
+            <a:r>
+              <a:rPr sz="1050" b="0" i="0" dirty="0">
+                <a:solidFill>
+                  <a:srgbClr val="444444"/>
+                </a:solidFill>
+              </a:rPr>
+              <a:t> 24시간 </a:t>
+            </a:r>
+            <a:r>
+              <a:rPr sz="1050" b="0" i="0" dirty="0" err="1">
+                <a:solidFill>
+                  <a:srgbClr val="444444"/>
+                </a:solidFill>
+              </a:rPr>
+              <a:t>수동으로</a:t>
+            </a:r>
+            <a:r>
+              <a:rPr sz="1050" b="0" i="0" dirty="0">
+                <a:solidFill>
+                  <a:srgbClr val="444444"/>
+                </a:solidFill>
+              </a:rPr>
+              <a:t> </a:t>
+            </a:r>
+            <a:r>
+              <a:rPr sz="1050" b="0" i="0" dirty="0" err="1">
+                <a:solidFill>
+                  <a:srgbClr val="444444"/>
+                </a:solidFill>
+              </a:rPr>
+              <a:t>모니터링하는</a:t>
+            </a:r>
+            <a:r>
+              <a:rPr sz="1050" b="0" i="0" dirty="0">
+                <a:solidFill>
+                  <a:srgbClr val="444444"/>
+                </a:solidFill>
+              </a:rPr>
+              <a:t> </a:t>
+            </a:r>
+            <a:r>
+              <a:rPr sz="1050" b="0" i="0" dirty="0" err="1">
+                <a:solidFill>
+                  <a:srgbClr val="444444"/>
+                </a:solidFill>
+              </a:rPr>
+              <a:t>것은</a:t>
+            </a:r>
+            <a:r>
+              <a:rPr sz="1050" b="0" i="0" dirty="0">
+                <a:solidFill>
+                  <a:srgbClr val="444444"/>
+                </a:solidFill>
+              </a:rPr>
+              <a:t> </a:t>
+            </a:r>
+            <a:r>
+              <a:rPr sz="1050" b="0" i="0" dirty="0" err="1">
+                <a:solidFill>
+                  <a:srgbClr val="444444"/>
+                </a:solidFill>
+              </a:rPr>
+              <a:t>불가능합니다</a:t>
+            </a:r>
+            <a:r>
+              <a:rPr sz="1050" b="0" i="0" dirty="0">
+                <a:solidFill>
+                  <a:srgbClr val="444444"/>
+                </a:solidFill>
+              </a:rPr>
+              <a:t>.
+</a:t>
+            </a:r>
+            <a:r>
+              <a:rPr sz="1050" b="0" i="0" dirty="0" err="1">
+                <a:solidFill>
+                  <a:srgbClr val="444444"/>
+                </a:solidFill>
+              </a:rPr>
+              <a:t>또한</a:t>
+            </a:r>
+            <a:r>
+              <a:rPr sz="1050" b="0" i="0" dirty="0">
+                <a:solidFill>
+                  <a:srgbClr val="444444"/>
+                </a:solidFill>
+              </a:rPr>
+              <a:t> 봇 </a:t>
+            </a:r>
+            <a:r>
+              <a:rPr sz="1050" b="0" i="0" dirty="0" err="1">
+                <a:solidFill>
+                  <a:srgbClr val="444444"/>
+                </a:solidFill>
+              </a:rPr>
+              <a:t>공격인지</a:t>
+            </a:r>
+            <a:r>
+              <a:rPr sz="1050" b="0" i="0" dirty="0">
+                <a:solidFill>
+                  <a:srgbClr val="444444"/>
+                </a:solidFill>
+              </a:rPr>
+              <a:t> </a:t>
+            </a:r>
+            <a:r>
+              <a:rPr sz="1050" b="0" i="0" dirty="0" err="1">
+                <a:solidFill>
+                  <a:srgbClr val="444444"/>
+                </a:solidFill>
+              </a:rPr>
+              <a:t>실제</a:t>
+            </a:r>
+            <a:r>
+              <a:rPr sz="1050" b="0" i="0" dirty="0">
+                <a:solidFill>
+                  <a:srgbClr val="444444"/>
+                </a:solidFill>
+              </a:rPr>
+              <a:t> </a:t>
+            </a:r>
+            <a:r>
+              <a:rPr sz="1050" b="0" i="0" dirty="0" err="1">
+                <a:solidFill>
+                  <a:srgbClr val="444444"/>
+                </a:solidFill>
+              </a:rPr>
+              <a:t>소비자</a:t>
+            </a:r>
+            <a:r>
+              <a:rPr sz="1050" b="0" i="0" dirty="0">
+                <a:solidFill>
+                  <a:srgbClr val="444444"/>
+                </a:solidFill>
+              </a:rPr>
+              <a:t> </a:t>
+            </a:r>
+            <a:r>
+              <a:rPr sz="1050" b="0" i="0" dirty="0" err="1">
+                <a:solidFill>
+                  <a:srgbClr val="444444"/>
+                </a:solidFill>
+              </a:rPr>
+              <a:t>불만인지</a:t>
+            </a:r>
+            <a:r>
+              <a:rPr sz="1050" b="0" i="0" dirty="0">
+                <a:solidFill>
+                  <a:srgbClr val="444444"/>
+                </a:solidFill>
+              </a:rPr>
+              <a:t> </a:t>
+            </a:r>
+            <a:r>
+              <a:rPr sz="1050" b="0" i="0" dirty="0" err="1">
+                <a:solidFill>
+                  <a:srgbClr val="444444"/>
+                </a:solidFill>
+              </a:rPr>
+              <a:t>구분하지</a:t>
+            </a:r>
+            <a:r>
+              <a:rPr sz="1050" b="0" i="0" dirty="0">
+                <a:solidFill>
+                  <a:srgbClr val="444444"/>
+                </a:solidFill>
+              </a:rPr>
+              <a:t> </a:t>
+            </a:r>
+            <a:r>
+              <a:rPr sz="1050" b="0" i="0" dirty="0" err="1">
+                <a:solidFill>
+                  <a:srgbClr val="444444"/>
+                </a:solidFill>
+              </a:rPr>
+              <a:t>못하면</a:t>
+            </a:r>
+            <a:r>
+              <a:rPr sz="1050" b="0" i="0" dirty="0">
+                <a:solidFill>
+                  <a:srgbClr val="444444"/>
+                </a:solidFill>
+              </a:rPr>
+              <a:t> </a:t>
+            </a:r>
+            <a:r>
+              <a:rPr sz="1050" b="0" i="0" dirty="0" err="1">
+                <a:solidFill>
+                  <a:srgbClr val="444444"/>
+                </a:solidFill>
+              </a:rPr>
+              <a:t>불필요한</a:t>
+            </a:r>
+            <a:r>
+              <a:rPr sz="1050" b="0" i="0" dirty="0">
+                <a:solidFill>
+                  <a:srgbClr val="444444"/>
+                </a:solidFill>
+              </a:rPr>
+              <a:t> </a:t>
+            </a:r>
+            <a:r>
+              <a:rPr sz="1050" b="0" i="0" dirty="0" err="1">
+                <a:solidFill>
+                  <a:srgbClr val="444444"/>
+                </a:solidFill>
+              </a:rPr>
+              <a:t>법적</a:t>
+            </a:r>
+            <a:r>
+              <a:rPr sz="1050" b="0" i="0" dirty="0">
+                <a:solidFill>
+                  <a:srgbClr val="444444"/>
+                </a:solidFill>
+              </a:rPr>
+              <a:t> </a:t>
+            </a:r>
+            <a:r>
+              <a:rPr sz="1050" b="0" i="0" dirty="0" err="1">
+                <a:solidFill>
+                  <a:srgbClr val="444444"/>
+                </a:solidFill>
+              </a:rPr>
+              <a:t>대응으로</a:t>
+            </a:r>
+            <a:r>
+              <a:rPr sz="1050" b="0" i="0" dirty="0">
+                <a:solidFill>
+                  <a:srgbClr val="444444"/>
+                </a:solidFill>
+              </a:rPr>
+              <a:t> </a:t>
+            </a:r>
+            <a:r>
+              <a:rPr sz="1050" b="0" i="0" dirty="0" err="1">
+                <a:solidFill>
+                  <a:srgbClr val="444444"/>
+                </a:solidFill>
+              </a:rPr>
+              <a:t>비용이</a:t>
+            </a:r>
+            <a:r>
+              <a:rPr sz="1050" b="0" i="0" dirty="0">
+                <a:solidFill>
+                  <a:srgbClr val="444444"/>
+                </a:solidFill>
+              </a:rPr>
+              <a:t> </a:t>
+            </a:r>
+            <a:r>
+              <a:rPr sz="1050" b="0" i="0" dirty="0" err="1">
+                <a:solidFill>
+                  <a:srgbClr val="444444"/>
+                </a:solidFill>
+              </a:rPr>
+              <a:t>낭비됩니다</a:t>
+            </a:r>
+            <a:r>
+              <a:rPr sz="1050" b="0" i="0" dirty="0">
+                <a:solidFill>
+                  <a:srgbClr val="444444"/>
+                </a:solidFill>
+              </a:rPr>
+              <a:t>.</a:t>
             </a:r>
           </a:p>
         </p:txBody>
@@ -30873,7 +31594,7 @@
 </file>
 
 <file path=ppt/slides/slide5.xml><?xml version="1.0" encoding="utf-8"?>
-<p:sld xmlns:a="http://schemas.openxmlformats.org/drawingml/2006/main" xmlns:p="http://schemas.openxmlformats.org/presentationml/2006/main" xmlns:r="http://schemas.openxmlformats.org/officeDocument/2006/relationships">
+<p:sld xmlns:a="http://schemas.openxmlformats.org/drawingml/2006/main" xmlns:r="http://schemas.openxmlformats.org/officeDocument/2006/relationships" xmlns:p="http://schemas.openxmlformats.org/presentationml/2006/main">
   <p:cSld>
     <p:spTree>
       <p:nvGrpSpPr>
@@ -30881,7 +31602,14 @@
         <p:cNvGrpSpPr/>
         <p:nvPr/>
       </p:nvGrpSpPr>
-      <p:grpSpPr/>
+      <p:grpSpPr>
+        <a:xfrm>
+          <a:off x="0" y="0"/>
+          <a:ext cx="0" cy="0"/>
+          <a:chOff x="0" y="0"/>
+          <a:chExt cx="0" cy="0"/>
+        </a:xfrm>
+      </p:grpSpPr>
       <p:sp>
         <p:nvSpPr>
           <p:cNvPr id="2" name="Rectangle 1"/>
@@ -30922,6 +31650,7 @@
           <a:lstStyle/>
           <a:p>
             <a:pPr algn="ctr"/>
+            <a:endParaRPr/>
           </a:p>
         </p:txBody>
       </p:sp>
@@ -30965,6 +31694,7 @@
           <a:lstStyle/>
           <a:p>
             <a:pPr algn="ctr"/>
+            <a:endParaRPr/>
           </a:p>
         </p:txBody>
       </p:sp>
@@ -31042,6 +31772,7 @@
           <a:lstStyle/>
           <a:p>
             <a:pPr algn="ctr"/>
+            <a:endParaRPr/>
           </a:p>
         </p:txBody>
       </p:sp>
@@ -31153,6 +31884,7 @@
           <a:lstStyle/>
           <a:p>
             <a:pPr algn="ctr"/>
+            <a:endParaRPr/>
           </a:p>
         </p:txBody>
       </p:sp>
@@ -31230,6 +31962,7 @@
           <a:lstStyle/>
           <a:p>
             <a:pPr algn="ctr"/>
+            <a:endParaRPr/>
           </a:p>
         </p:txBody>
       </p:sp>
@@ -31341,6 +32074,7 @@
           <a:lstStyle/>
           <a:p>
             <a:pPr algn="ctr"/>
+            <a:endParaRPr/>
           </a:p>
         </p:txBody>
       </p:sp>
@@ -31452,6 +32186,7 @@
           <a:lstStyle/>
           <a:p>
             <a:pPr algn="ctr"/>
+            <a:endParaRPr/>
           </a:p>
         </p:txBody>
       </p:sp>
@@ -31563,6 +32298,7 @@
           <a:lstStyle/>
           <a:p>
             <a:pPr algn="ctr"/>
+            <a:endParaRPr/>
           </a:p>
         </p:txBody>
       </p:sp>
@@ -31674,6 +32410,7 @@
           <a:lstStyle/>
           <a:p>
             <a:pPr algn="ctr"/>
+            <a:endParaRPr/>
           </a:p>
         </p:txBody>
       </p:sp>
@@ -31785,6 +32522,7 @@
           <a:lstStyle/>
           <a:p>
             <a:pPr algn="ctr"/>
+            <a:endParaRPr/>
           </a:p>
         </p:txBody>
       </p:sp>
@@ -31862,6 +32600,7 @@
           <a:lstStyle/>
           <a:p>
             <a:pPr algn="ctr"/>
+            <a:endParaRPr/>
           </a:p>
         </p:txBody>
       </p:sp>
@@ -31973,6 +32712,7 @@
           <a:lstStyle/>
           <a:p>
             <a:pPr algn="ctr"/>
+            <a:endParaRPr/>
           </a:p>
         </p:txBody>
       </p:sp>
@@ -32084,6 +32824,7 @@
           <a:lstStyle/>
           <a:p>
             <a:pPr algn="ctr"/>
+            <a:endParaRPr/>
           </a:p>
         </p:txBody>
       </p:sp>
@@ -32195,6 +32936,7 @@
           <a:lstStyle/>
           <a:p>
             <a:pPr algn="ctr"/>
+            <a:endParaRPr/>
           </a:p>
         </p:txBody>
       </p:sp>
@@ -32306,6 +33048,7 @@
           <a:lstStyle/>
           <a:p>
             <a:pPr algn="ctr"/>
+            <a:endParaRPr/>
           </a:p>
         </p:txBody>
       </p:sp>
@@ -32417,6 +33160,7 @@
           <a:lstStyle/>
           <a:p>
             <a:pPr algn="ctr"/>
+            <a:endParaRPr/>
           </a:p>
         </p:txBody>
       </p:sp>
@@ -32494,6 +33238,7 @@
           <a:lstStyle/>
           <a:p>
             <a:pPr algn="ctr"/>
+            <a:endParaRPr/>
           </a:p>
         </p:txBody>
       </p:sp>
@@ -32605,6 +33350,7 @@
           <a:lstStyle/>
           <a:p>
             <a:pPr algn="ctr"/>
+            <a:endParaRPr/>
           </a:p>
         </p:txBody>
       </p:sp>
@@ -32716,6 +33462,7 @@
           <a:lstStyle/>
           <a:p>
             <a:pPr algn="ctr"/>
+            <a:endParaRPr/>
           </a:p>
         </p:txBody>
       </p:sp>
@@ -32827,6 +33574,7 @@
           <a:lstStyle/>
           <a:p>
             <a:pPr algn="ctr"/>
+            <a:endParaRPr/>
           </a:p>
         </p:txBody>
       </p:sp>
@@ -32938,6 +33686,7 @@
           <a:lstStyle/>
           <a:p>
             <a:pPr algn="ctr"/>
+            <a:endParaRPr/>
           </a:p>
         </p:txBody>
       </p:sp>
@@ -33018,7 +33767,7 @@
 </file>
 
 <file path=ppt/slides/slide6.xml><?xml version="1.0" encoding="utf-8"?>
-<p:sld xmlns:a="http://schemas.openxmlformats.org/drawingml/2006/main" xmlns:p="http://schemas.openxmlformats.org/presentationml/2006/main" xmlns:r="http://schemas.openxmlformats.org/officeDocument/2006/relationships">
+<p:sld xmlns:a="http://schemas.openxmlformats.org/drawingml/2006/main" xmlns:r="http://schemas.openxmlformats.org/officeDocument/2006/relationships" xmlns:p="http://schemas.openxmlformats.org/presentationml/2006/main">
   <p:cSld>
     <p:spTree>
       <p:nvGrpSpPr>
@@ -33026,7 +33775,14 @@
         <p:cNvGrpSpPr/>
         <p:nvPr/>
       </p:nvGrpSpPr>
-      <p:grpSpPr/>
+      <p:grpSpPr>
+        <a:xfrm>
+          <a:off x="0" y="0"/>
+          <a:ext cx="0" cy="0"/>
+          <a:chOff x="0" y="0"/>
+          <a:chExt cx="0" cy="0"/>
+        </a:xfrm>
+      </p:grpSpPr>
       <p:sp>
         <p:nvSpPr>
           <p:cNvPr id="2" name="Rectangle 1"/>
@@ -33067,6 +33823,7 @@
           <a:lstStyle/>
           <a:p>
             <a:pPr algn="ctr"/>
+            <a:endParaRPr/>
           </a:p>
         </p:txBody>
       </p:sp>
@@ -33110,6 +33867,7 @@
           <a:lstStyle/>
           <a:p>
             <a:pPr algn="ctr"/>
+            <a:endParaRPr/>
           </a:p>
         </p:txBody>
       </p:sp>
@@ -33221,6 +33979,7 @@
           <a:lstStyle/>
           <a:p>
             <a:pPr algn="ctr"/>
+            <a:endParaRPr/>
           </a:p>
         </p:txBody>
       </p:sp>
@@ -33332,6 +34091,7 @@
           <a:lstStyle/>
           <a:p>
             <a:pPr algn="ctr"/>
+            <a:endParaRPr/>
           </a:p>
         </p:txBody>
       </p:sp>
@@ -33479,6 +34239,7 @@
           <a:lstStyle/>
           <a:p>
             <a:pPr algn="ctr"/>
+            <a:endParaRPr/>
           </a:p>
         </p:txBody>
       </p:sp>
@@ -33625,6 +34386,7 @@
           <a:lstStyle/>
           <a:p>
             <a:pPr algn="ctr"/>
+            <a:endParaRPr/>
           </a:p>
         </p:txBody>
       </p:sp>
@@ -33771,6 +34533,7 @@
           <a:lstStyle/>
           <a:p>
             <a:pPr algn="ctr"/>
+            <a:endParaRPr/>
           </a:p>
         </p:txBody>
       </p:sp>
@@ -33917,6 +34680,7 @@
           <a:lstStyle/>
           <a:p>
             <a:pPr algn="ctr"/>
+            <a:endParaRPr/>
           </a:p>
         </p:txBody>
       </p:sp>
@@ -34063,6 +34827,7 @@
           <a:lstStyle/>
           <a:p>
             <a:pPr algn="ctr"/>
+            <a:endParaRPr/>
           </a:p>
         </p:txBody>
       </p:sp>
@@ -34175,6 +34940,7 @@
           <a:lstStyle/>
           <a:p>
             <a:pPr algn="ctr"/>
+            <a:endParaRPr/>
           </a:p>
         </p:txBody>
       </p:sp>
@@ -34490,6 +35256,7 @@
           <a:lstStyle/>
           <a:p>
             <a:pPr algn="ctr"/>
+            <a:endParaRPr/>
           </a:p>
         </p:txBody>
       </p:sp>
@@ -34533,6 +35300,7 @@
           <a:lstStyle/>
           <a:p>
             <a:pPr algn="ctr"/>
+            <a:endParaRPr/>
           </a:p>
         </p:txBody>
       </p:sp>
@@ -34610,6 +35378,7 @@
           <a:lstStyle/>
           <a:p>
             <a:pPr algn="ctr"/>
+            <a:endParaRPr/>
           </a:p>
         </p:txBody>
       </p:sp>
@@ -34687,6 +35456,7 @@
           <a:lstStyle/>
           <a:p>
             <a:pPr algn="ctr"/>
+            <a:endParaRPr/>
           </a:p>
         </p:txBody>
       </p:sp>
@@ -34764,6 +35534,7 @@
           <a:lstStyle/>
           <a:p>
             <a:pPr algn="ctr"/>
+            <a:endParaRPr/>
           </a:p>
         </p:txBody>
       </p:sp>
@@ -34841,6 +35612,7 @@
           <a:lstStyle/>
           <a:p>
             <a:pPr algn="ctr"/>
+            <a:endParaRPr/>
           </a:p>
         </p:txBody>
       </p:sp>
@@ -34884,6 +35656,7 @@
           <a:lstStyle/>
           <a:p>
             <a:pPr algn="ctr"/>
+            <a:endParaRPr/>
           </a:p>
         </p:txBody>
       </p:sp>
@@ -34961,6 +35734,7 @@
           <a:lstStyle/>
           <a:p>
             <a:pPr algn="ctr"/>
+            <a:endParaRPr/>
           </a:p>
         </p:txBody>
       </p:sp>
@@ -35004,6 +35778,7 @@
           <a:lstStyle/>
           <a:p>
             <a:pPr algn="ctr"/>
+            <a:endParaRPr/>
           </a:p>
         </p:txBody>
       </p:sp>
@@ -35115,6 +35890,7 @@
           <a:lstStyle/>
           <a:p>
             <a:pPr algn="ctr"/>
+            <a:endParaRPr/>
           </a:p>
         </p:txBody>
       </p:sp>
@@ -35158,6 +35934,7 @@
           <a:lstStyle/>
           <a:p>
             <a:pPr algn="ctr"/>
+            <a:endParaRPr/>
           </a:p>
         </p:txBody>
       </p:sp>
@@ -35269,6 +36046,7 @@
           <a:lstStyle/>
           <a:p>
             <a:pPr algn="ctr"/>
+            <a:endParaRPr/>
           </a:p>
         </p:txBody>
       </p:sp>
@@ -35312,6 +36090,7 @@
           <a:lstStyle/>
           <a:p>
             <a:pPr algn="ctr"/>
+            <a:endParaRPr/>
           </a:p>
         </p:txBody>
       </p:sp>
@@ -35423,6 +36202,7 @@
           <a:lstStyle/>
           <a:p>
             <a:pPr algn="ctr"/>
+            <a:endParaRPr/>
           </a:p>
         </p:txBody>
       </p:sp>
@@ -35466,6 +36246,7 @@
           <a:lstStyle/>
           <a:p>
             <a:pPr algn="ctr"/>
+            <a:endParaRPr/>
           </a:p>
         </p:txBody>
       </p:sp>
@@ -35546,7 +36327,7 @@
 </file>
 
 <file path=ppt/slides/slide7.xml><?xml version="1.0" encoding="utf-8"?>
-<p:sld xmlns:a="http://schemas.openxmlformats.org/drawingml/2006/main" xmlns:p="http://schemas.openxmlformats.org/presentationml/2006/main" xmlns:r="http://schemas.openxmlformats.org/officeDocument/2006/relationships">
+<p:sld xmlns:a="http://schemas.openxmlformats.org/drawingml/2006/main" xmlns:r="http://schemas.openxmlformats.org/officeDocument/2006/relationships" xmlns:p="http://schemas.openxmlformats.org/presentationml/2006/main">
   <p:cSld>
     <p:spTree>
       <p:nvGrpSpPr>
@@ -35554,7 +36335,14 @@
         <p:cNvGrpSpPr/>
         <p:nvPr/>
       </p:nvGrpSpPr>
-      <p:grpSpPr/>
+      <p:grpSpPr>
+        <a:xfrm>
+          <a:off x="0" y="0"/>
+          <a:ext cx="0" cy="0"/>
+          <a:chOff x="0" y="0"/>
+          <a:chExt cx="0" cy="0"/>
+        </a:xfrm>
+      </p:grpSpPr>
       <p:sp>
         <p:nvSpPr>
           <p:cNvPr id="2" name="Rectangle 1"/>
@@ -35595,6 +36383,7 @@
           <a:lstStyle/>
           <a:p>
             <a:pPr algn="ctr"/>
+            <a:endParaRPr/>
           </a:p>
         </p:txBody>
       </p:sp>
@@ -35638,6 +36427,7 @@
           <a:lstStyle/>
           <a:p>
             <a:pPr algn="ctr"/>
+            <a:endParaRPr/>
           </a:p>
         </p:txBody>
       </p:sp>
@@ -35787,7 +36577,7 @@
 </file>
 
 <file path=ppt/slides/slide8.xml><?xml version="1.0" encoding="utf-8"?>
-<p:sld xmlns:a="http://schemas.openxmlformats.org/drawingml/2006/main" xmlns:p="http://schemas.openxmlformats.org/presentationml/2006/main" xmlns:r="http://schemas.openxmlformats.org/officeDocument/2006/relationships">
+<p:sld xmlns:a="http://schemas.openxmlformats.org/drawingml/2006/main" xmlns:r="http://schemas.openxmlformats.org/officeDocument/2006/relationships" xmlns:p="http://schemas.openxmlformats.org/presentationml/2006/main">
   <p:cSld>
     <p:spTree>
       <p:nvGrpSpPr>
@@ -35795,7 +36585,14 @@
         <p:cNvGrpSpPr/>
         <p:nvPr/>
       </p:nvGrpSpPr>
-      <p:grpSpPr/>
+      <p:grpSpPr>
+        <a:xfrm>
+          <a:off x="0" y="0"/>
+          <a:ext cx="0" cy="0"/>
+          <a:chOff x="0" y="0"/>
+          <a:chExt cx="0" cy="0"/>
+        </a:xfrm>
+      </p:grpSpPr>
       <p:sp>
         <p:nvSpPr>
           <p:cNvPr id="2" name="Rectangle 1"/>
@@ -35836,6 +36633,7 @@
           <a:lstStyle/>
           <a:p>
             <a:pPr algn="ctr"/>
+            <a:endParaRPr/>
           </a:p>
         </p:txBody>
       </p:sp>
@@ -35879,6 +36677,7 @@
           <a:lstStyle/>
           <a:p>
             <a:pPr algn="ctr"/>
+            <a:endParaRPr/>
           </a:p>
         </p:txBody>
       </p:sp>
@@ -35990,6 +36789,7 @@
           <a:lstStyle/>
           <a:p>
             <a:pPr algn="ctr"/>
+            <a:endParaRPr/>
           </a:p>
         </p:txBody>
       </p:sp>
@@ -36101,6 +36901,7 @@
           <a:lstStyle/>
           <a:p>
             <a:pPr algn="ctr"/>
+            <a:endParaRPr/>
           </a:p>
         </p:txBody>
       </p:sp>
@@ -36144,6 +36945,7 @@
           <a:lstStyle/>
           <a:p>
             <a:pPr algn="ctr"/>
+            <a:endParaRPr/>
           </a:p>
         </p:txBody>
       </p:sp>
@@ -36255,6 +37057,7 @@
           <a:lstStyle/>
           <a:p>
             <a:pPr algn="ctr"/>
+            <a:endParaRPr/>
           </a:p>
         </p:txBody>
       </p:sp>
@@ -36366,6 +37169,7 @@
           <a:lstStyle/>
           <a:p>
             <a:pPr algn="ctr"/>
+            <a:endParaRPr/>
           </a:p>
         </p:txBody>
       </p:sp>
@@ -36443,6 +37247,7 @@
           <a:lstStyle/>
           <a:p>
             <a:pPr algn="ctr"/>
+            <a:endParaRPr/>
           </a:p>
         </p:txBody>
       </p:sp>
@@ -36520,6 +37325,7 @@
           <a:lstStyle/>
           <a:p>
             <a:pPr algn="ctr"/>
+            <a:endParaRPr/>
           </a:p>
         </p:txBody>
       </p:sp>
@@ -36597,6 +37403,7 @@
           <a:lstStyle/>
           <a:p>
             <a:pPr algn="ctr"/>
+            <a:endParaRPr/>
           </a:p>
         </p:txBody>
       </p:sp>
@@ -36674,6 +37481,7 @@
           <a:lstStyle/>
           <a:p>
             <a:pPr algn="ctr"/>
+            <a:endParaRPr/>
           </a:p>
         </p:txBody>
       </p:sp>
@@ -36785,6 +37593,7 @@
           <a:lstStyle/>
           <a:p>
             <a:pPr algn="ctr"/>
+            <a:endParaRPr/>
           </a:p>
         </p:txBody>
       </p:sp>
@@ -36828,6 +37637,7 @@
           <a:lstStyle/>
           <a:p>
             <a:pPr algn="ctr"/>
+            <a:endParaRPr/>
           </a:p>
         </p:txBody>
       </p:sp>
@@ -36939,6 +37749,7 @@
           <a:lstStyle/>
           <a:p>
             <a:pPr algn="ctr"/>
+            <a:endParaRPr/>
           </a:p>
         </p:txBody>
       </p:sp>
@@ -37050,6 +37861,7 @@
           <a:lstStyle/>
           <a:p>
             <a:pPr algn="ctr"/>
+            <a:endParaRPr/>
           </a:p>
         </p:txBody>
       </p:sp>
@@ -37127,6 +37939,7 @@
           <a:lstStyle/>
           <a:p>
             <a:pPr algn="ctr"/>
+            <a:endParaRPr/>
           </a:p>
         </p:txBody>
       </p:sp>
@@ -37204,6 +38017,7 @@
           <a:lstStyle/>
           <a:p>
             <a:pPr algn="ctr"/>
+            <a:endParaRPr/>
           </a:p>
         </p:txBody>
       </p:sp>
@@ -37281,6 +38095,7 @@
           <a:lstStyle/>
           <a:p>
             <a:pPr algn="ctr"/>
+            <a:endParaRPr/>
           </a:p>
         </p:txBody>
       </p:sp>
@@ -37358,6 +38173,7 @@
           <a:lstStyle/>
           <a:p>
             <a:pPr algn="ctr"/>
+            <a:endParaRPr/>
           </a:p>
         </p:txBody>
       </p:sp>
@@ -37469,6 +38285,7 @@
           <a:lstStyle/>
           <a:p>
             <a:pPr algn="ctr"/>
+            <a:endParaRPr/>
           </a:p>
         </p:txBody>
       </p:sp>
@@ -37512,6 +38329,7 @@
           <a:lstStyle/>
           <a:p>
             <a:pPr algn="ctr"/>
+            <a:endParaRPr/>
           </a:p>
         </p:txBody>
       </p:sp>
@@ -37623,6 +38441,7 @@
           <a:lstStyle/>
           <a:p>
             <a:pPr algn="ctr"/>
+            <a:endParaRPr/>
           </a:p>
         </p:txBody>
       </p:sp>
@@ -37734,6 +38553,7 @@
           <a:lstStyle/>
           <a:p>
             <a:pPr algn="ctr"/>
+            <a:endParaRPr/>
           </a:p>
         </p:txBody>
       </p:sp>
@@ -37811,6 +38631,7 @@
           <a:lstStyle/>
           <a:p>
             <a:pPr algn="ctr"/>
+            <a:endParaRPr/>
           </a:p>
         </p:txBody>
       </p:sp>
@@ -37888,6 +38709,7 @@
           <a:lstStyle/>
           <a:p>
             <a:pPr algn="ctr"/>
+            <a:endParaRPr/>
           </a:p>
         </p:txBody>
       </p:sp>
@@ -37965,6 +38787,7 @@
           <a:lstStyle/>
           <a:p>
             <a:pPr algn="ctr"/>
+            <a:endParaRPr/>
           </a:p>
         </p:txBody>
       </p:sp>
@@ -38042,6 +38865,7 @@
           <a:lstStyle/>
           <a:p>
             <a:pPr algn="ctr"/>
+            <a:endParaRPr/>
           </a:p>
         </p:txBody>
       </p:sp>
@@ -38088,7 +38912,7 @@
 </file>
 
 <file path=ppt/slides/slide9.xml><?xml version="1.0" encoding="utf-8"?>
-<p:sld xmlns:a="http://schemas.openxmlformats.org/drawingml/2006/main" xmlns:p="http://schemas.openxmlformats.org/presentationml/2006/main" xmlns:r="http://schemas.openxmlformats.org/officeDocument/2006/relationships">
+<p:sld xmlns:a="http://schemas.openxmlformats.org/drawingml/2006/main" xmlns:r="http://schemas.openxmlformats.org/officeDocument/2006/relationships" xmlns:p="http://schemas.openxmlformats.org/presentationml/2006/main">
   <p:cSld>
     <p:spTree>
       <p:nvGrpSpPr>
@@ -38096,7 +38920,14 @@
         <p:cNvGrpSpPr/>
         <p:nvPr/>
       </p:nvGrpSpPr>
-      <p:grpSpPr/>
+      <p:grpSpPr>
+        <a:xfrm>
+          <a:off x="0" y="0"/>
+          <a:ext cx="0" cy="0"/>
+          <a:chOff x="0" y="0"/>
+          <a:chExt cx="0" cy="0"/>
+        </a:xfrm>
+      </p:grpSpPr>
       <p:sp>
         <p:nvSpPr>
           <p:cNvPr id="2" name="Rectangle 1"/>
@@ -38137,6 +38968,7 @@
           <a:lstStyle/>
           <a:p>
             <a:pPr algn="ctr"/>
+            <a:endParaRPr/>
           </a:p>
         </p:txBody>
       </p:sp>
@@ -38180,6 +39012,7 @@
           <a:lstStyle/>
           <a:p>
             <a:pPr algn="ctr"/>
+            <a:endParaRPr/>
           </a:p>
         </p:txBody>
       </p:sp>
